--- a/slides/ADRD_MultiAgent_v2.pptx
+++ b/slides/ADRD_MultiAgent_v2.pptx
@@ -5,16 +5,16 @@
     <p:sldMasterId id="2147483648" r:id="rId1"/>
   </p:sldMasterIdLst>
   <p:sldIdLst>
-    <p:sldId id="256" r:id="rId7"/>
-    <p:sldId id="257" r:id="rId8"/>
-    <p:sldId id="258" r:id="rId9"/>
-    <p:sldId id="259" r:id="rId10"/>
-    <p:sldId id="260" r:id="rId11"/>
-    <p:sldId id="261" r:id="rId12"/>
-    <p:sldId id="262" r:id="rId13"/>
-    <p:sldId id="263" r:id="rId14"/>
+    <p:sldId id="256" r:id="rId2"/>
+    <p:sldId id="257" r:id="rId3"/>
+    <p:sldId id="264" r:id="rId4"/>
+    <p:sldId id="259" r:id="rId5"/>
+    <p:sldId id="260" r:id="rId6"/>
+    <p:sldId id="261" r:id="rId7"/>
+    <p:sldId id="262" r:id="rId8"/>
+    <p:sldId id="263" r:id="rId9"/>
   </p:sldIdLst>
-  <p:sldSz cx="12191695" cy="6858000" type="screen4x3"/>
+  <p:sldSz cx="12192000" cy="6858000"/>
   <p:notesSz cx="6858000" cy="9144000"/>
   <p:defaultTextStyle>
     <a:defPPr>
@@ -111,6 +111,22 @@
       </a:defRPr>
     </a:lvl9pPr>
   </p:defaultTextStyle>
+  <p:extLst>
+    <p:ext uri="{EFAFB233-063F-42B5-8137-9DF3F51BA10A}">
+      <p15:sldGuideLst xmlns:p15="http://schemas.microsoft.com/office/powerpoint/2012/main">
+        <p15:guide id="1" orient="horz" pos="2160">
+          <p15:clr>
+            <a:srgbClr val="A4A3A4"/>
+          </p15:clr>
+        </p15:guide>
+        <p15:guide id="2" pos="2880">
+          <p15:clr>
+            <a:srgbClr val="A4A3A4"/>
+          </p15:clr>
+        </p15:guide>
+      </p15:sldGuideLst>
+    </p:ext>
+  </p:extLst>
 </p:presentation>
 </file>
 
@@ -152,10 +168,9 @@
           <a:lstStyle/>
           <a:p>
             <a:r>
-              <a:rPr lang="en-US" smtClean="0"/>
+              <a:rPr lang="en-US"/>
               <a:t>Click to edit Master title style</a:t>
             </a:r>
-            <a:endParaRPr lang="en-US"/>
           </a:p>
         </p:txBody>
       </p:sp>
@@ -271,10 +286,9 @@
           </a:lstStyle>
           <a:p>
             <a:r>
-              <a:rPr lang="en-US" smtClean="0"/>
+              <a:rPr lang="en-US"/>
               <a:t>Click to edit Master subtitle style</a:t>
             </a:r>
-            <a:endParaRPr lang="en-US"/>
           </a:p>
         </p:txBody>
       </p:sp>
@@ -295,7 +309,7 @@
           <a:p>
             <a:fld id="{5BCAD085-E8A6-8845-BD4E-CB4CCA059FC4}" type="datetimeFigureOut">
               <a:rPr lang="en-US" smtClean="0"/>
-              <a:t>1/27/13</a:t>
+              <a:t>7/5/26</a:t>
             </a:fld>
             <a:endParaRPr lang="en-US"/>
           </a:p>
@@ -389,10 +403,9 @@
           <a:lstStyle/>
           <a:p>
             <a:r>
-              <a:rPr lang="en-US" smtClean="0"/>
+              <a:rPr lang="en-US"/>
               <a:t>Click to edit Master title style</a:t>
             </a:r>
-            <a:endParaRPr lang="en-US"/>
           </a:p>
         </p:txBody>
       </p:sp>
@@ -413,38 +426,37 @@
           <a:p>
             <a:pPr lvl="0"/>
             <a:r>
-              <a:rPr lang="en-US" smtClean="0"/>
+              <a:rPr lang="en-US"/>
               <a:t>Click to edit Master text styles</a:t>
             </a:r>
           </a:p>
           <a:p>
             <a:pPr lvl="1"/>
             <a:r>
-              <a:rPr lang="en-US" smtClean="0"/>
+              <a:rPr lang="en-US"/>
               <a:t>Second level</a:t>
             </a:r>
           </a:p>
           <a:p>
             <a:pPr lvl="2"/>
             <a:r>
-              <a:rPr lang="en-US" smtClean="0"/>
+              <a:rPr lang="en-US"/>
               <a:t>Third level</a:t>
             </a:r>
           </a:p>
           <a:p>
             <a:pPr lvl="3"/>
             <a:r>
-              <a:rPr lang="en-US" smtClean="0"/>
+              <a:rPr lang="en-US"/>
               <a:t>Fourth level</a:t>
             </a:r>
           </a:p>
           <a:p>
             <a:pPr lvl="4"/>
             <a:r>
-              <a:rPr lang="en-US" smtClean="0"/>
+              <a:rPr lang="en-US"/>
               <a:t>Fifth level</a:t>
             </a:r>
-            <a:endParaRPr lang="en-US"/>
           </a:p>
         </p:txBody>
       </p:sp>
@@ -465,7 +477,7 @@
           <a:p>
             <a:fld id="{5BCAD085-E8A6-8845-BD4E-CB4CCA059FC4}" type="datetimeFigureOut">
               <a:rPr lang="en-US" smtClean="0"/>
-              <a:t>1/27/13</a:t>
+              <a:t>7/5/26</a:t>
             </a:fld>
             <a:endParaRPr lang="en-US"/>
           </a:p>
@@ -564,10 +576,9 @@
           <a:lstStyle/>
           <a:p>
             <a:r>
-              <a:rPr lang="en-US" smtClean="0"/>
+              <a:rPr lang="en-US"/>
               <a:t>Click to edit Master title style</a:t>
             </a:r>
-            <a:endParaRPr lang="en-US"/>
           </a:p>
         </p:txBody>
       </p:sp>
@@ -593,38 +604,37 @@
           <a:p>
             <a:pPr lvl="0"/>
             <a:r>
-              <a:rPr lang="en-US" smtClean="0"/>
+              <a:rPr lang="en-US"/>
               <a:t>Click to edit Master text styles</a:t>
             </a:r>
           </a:p>
           <a:p>
             <a:pPr lvl="1"/>
             <a:r>
-              <a:rPr lang="en-US" smtClean="0"/>
+              <a:rPr lang="en-US"/>
               <a:t>Second level</a:t>
             </a:r>
           </a:p>
           <a:p>
             <a:pPr lvl="2"/>
             <a:r>
-              <a:rPr lang="en-US" smtClean="0"/>
+              <a:rPr lang="en-US"/>
               <a:t>Third level</a:t>
             </a:r>
           </a:p>
           <a:p>
             <a:pPr lvl="3"/>
             <a:r>
-              <a:rPr lang="en-US" smtClean="0"/>
+              <a:rPr lang="en-US"/>
               <a:t>Fourth level</a:t>
             </a:r>
           </a:p>
           <a:p>
             <a:pPr lvl="4"/>
             <a:r>
-              <a:rPr lang="en-US" smtClean="0"/>
+              <a:rPr lang="en-US"/>
               <a:t>Fifth level</a:t>
             </a:r>
-            <a:endParaRPr lang="en-US"/>
           </a:p>
         </p:txBody>
       </p:sp>
@@ -645,7 +655,7 @@
           <a:p>
             <a:fld id="{5BCAD085-E8A6-8845-BD4E-CB4CCA059FC4}" type="datetimeFigureOut">
               <a:rPr lang="en-US" smtClean="0"/>
-              <a:t>1/27/13</a:t>
+              <a:t>7/5/26</a:t>
             </a:fld>
             <a:endParaRPr lang="en-US"/>
           </a:p>
@@ -739,10 +749,9 @@
           <a:lstStyle/>
           <a:p>
             <a:r>
-              <a:rPr lang="en-US" smtClean="0"/>
+              <a:rPr lang="en-US"/>
               <a:t>Click to edit Master title style</a:t>
             </a:r>
-            <a:endParaRPr lang="en-US"/>
           </a:p>
         </p:txBody>
       </p:sp>
@@ -763,38 +772,37 @@
           <a:p>
             <a:pPr lvl="0"/>
             <a:r>
-              <a:rPr lang="en-US" smtClean="0"/>
+              <a:rPr lang="en-US"/>
               <a:t>Click to edit Master text styles</a:t>
             </a:r>
           </a:p>
           <a:p>
             <a:pPr lvl="1"/>
             <a:r>
-              <a:rPr lang="en-US" smtClean="0"/>
+              <a:rPr lang="en-US"/>
               <a:t>Second level</a:t>
             </a:r>
           </a:p>
           <a:p>
             <a:pPr lvl="2"/>
             <a:r>
-              <a:rPr lang="en-US" smtClean="0"/>
+              <a:rPr lang="en-US"/>
               <a:t>Third level</a:t>
             </a:r>
           </a:p>
           <a:p>
             <a:pPr lvl="3"/>
             <a:r>
-              <a:rPr lang="en-US" smtClean="0"/>
+              <a:rPr lang="en-US"/>
               <a:t>Fourth level</a:t>
             </a:r>
           </a:p>
           <a:p>
             <a:pPr lvl="4"/>
             <a:r>
-              <a:rPr lang="en-US" smtClean="0"/>
+              <a:rPr lang="en-US"/>
               <a:t>Fifth level</a:t>
             </a:r>
-            <a:endParaRPr lang="en-US"/>
           </a:p>
         </p:txBody>
       </p:sp>
@@ -815,7 +823,7 @@
           <a:p>
             <a:fld id="{5BCAD085-E8A6-8845-BD4E-CB4CCA059FC4}" type="datetimeFigureOut">
               <a:rPr lang="en-US" smtClean="0"/>
-              <a:t>1/27/13</a:t>
+              <a:t>7/5/26</a:t>
             </a:fld>
             <a:endParaRPr lang="en-US"/>
           </a:p>
@@ -918,10 +926,9 @@
           </a:lstStyle>
           <a:p>
             <a:r>
-              <a:rPr lang="en-US" smtClean="0"/>
+              <a:rPr lang="en-US"/>
               <a:t>Click to edit Master title style</a:t>
             </a:r>
-            <a:endParaRPr lang="en-US"/>
           </a:p>
         </p:txBody>
       </p:sp>
@@ -1038,7 +1045,7 @@
           <a:p>
             <a:pPr lvl="0"/>
             <a:r>
-              <a:rPr lang="en-US" smtClean="0"/>
+              <a:rPr lang="en-US"/>
               <a:t>Click to edit Master text styles</a:t>
             </a:r>
           </a:p>
@@ -1061,7 +1068,7 @@
           <a:p>
             <a:fld id="{5BCAD085-E8A6-8845-BD4E-CB4CCA059FC4}" type="datetimeFigureOut">
               <a:rPr lang="en-US" smtClean="0"/>
-              <a:t>1/27/13</a:t>
+              <a:t>7/5/26</a:t>
             </a:fld>
             <a:endParaRPr lang="en-US"/>
           </a:p>
@@ -1155,10 +1162,9 @@
           <a:lstStyle/>
           <a:p>
             <a:r>
-              <a:rPr lang="en-US" smtClean="0"/>
+              <a:rPr lang="en-US"/>
               <a:t>Click to edit Master title style</a:t>
             </a:r>
-            <a:endParaRPr lang="en-US"/>
           </a:p>
         </p:txBody>
       </p:sp>
@@ -1212,38 +1218,37 @@
           <a:p>
             <a:pPr lvl="0"/>
             <a:r>
-              <a:rPr lang="en-US" smtClean="0"/>
+              <a:rPr lang="en-US"/>
               <a:t>Click to edit Master text styles</a:t>
             </a:r>
           </a:p>
           <a:p>
             <a:pPr lvl="1"/>
             <a:r>
-              <a:rPr lang="en-US" smtClean="0"/>
+              <a:rPr lang="en-US"/>
               <a:t>Second level</a:t>
             </a:r>
           </a:p>
           <a:p>
             <a:pPr lvl="2"/>
             <a:r>
-              <a:rPr lang="en-US" smtClean="0"/>
+              <a:rPr lang="en-US"/>
               <a:t>Third level</a:t>
             </a:r>
           </a:p>
           <a:p>
             <a:pPr lvl="3"/>
             <a:r>
-              <a:rPr lang="en-US" smtClean="0"/>
+              <a:rPr lang="en-US"/>
               <a:t>Fourth level</a:t>
             </a:r>
           </a:p>
           <a:p>
             <a:pPr lvl="4"/>
             <a:r>
-              <a:rPr lang="en-US" smtClean="0"/>
+              <a:rPr lang="en-US"/>
               <a:t>Fifth level</a:t>
             </a:r>
-            <a:endParaRPr lang="en-US"/>
           </a:p>
         </p:txBody>
       </p:sp>
@@ -1297,38 +1302,37 @@
           <a:p>
             <a:pPr lvl="0"/>
             <a:r>
-              <a:rPr lang="en-US" smtClean="0"/>
+              <a:rPr lang="en-US"/>
               <a:t>Click to edit Master text styles</a:t>
             </a:r>
           </a:p>
           <a:p>
             <a:pPr lvl="1"/>
             <a:r>
-              <a:rPr lang="en-US" smtClean="0"/>
+              <a:rPr lang="en-US"/>
               <a:t>Second level</a:t>
             </a:r>
           </a:p>
           <a:p>
             <a:pPr lvl="2"/>
             <a:r>
-              <a:rPr lang="en-US" smtClean="0"/>
+              <a:rPr lang="en-US"/>
               <a:t>Third level</a:t>
             </a:r>
           </a:p>
           <a:p>
             <a:pPr lvl="3"/>
             <a:r>
-              <a:rPr lang="en-US" smtClean="0"/>
+              <a:rPr lang="en-US"/>
               <a:t>Fourth level</a:t>
             </a:r>
           </a:p>
           <a:p>
             <a:pPr lvl="4"/>
             <a:r>
-              <a:rPr lang="en-US" smtClean="0"/>
+              <a:rPr lang="en-US"/>
               <a:t>Fifth level</a:t>
             </a:r>
-            <a:endParaRPr lang="en-US"/>
           </a:p>
         </p:txBody>
       </p:sp>
@@ -1349,7 +1353,7 @@
           <a:p>
             <a:fld id="{5BCAD085-E8A6-8845-BD4E-CB4CCA059FC4}" type="datetimeFigureOut">
               <a:rPr lang="en-US" smtClean="0"/>
-              <a:t>1/27/13</a:t>
+              <a:t>7/5/26</a:t>
             </a:fld>
             <a:endParaRPr lang="en-US"/>
           </a:p>
@@ -1447,10 +1451,9 @@
           </a:lstStyle>
           <a:p>
             <a:r>
-              <a:rPr lang="en-US" smtClean="0"/>
+              <a:rPr lang="en-US"/>
               <a:t>Click to edit Master title style</a:t>
             </a:r>
-            <a:endParaRPr lang="en-US"/>
           </a:p>
         </p:txBody>
       </p:sp>
@@ -1513,7 +1516,7 @@
           <a:p>
             <a:pPr lvl="0"/>
             <a:r>
-              <a:rPr lang="en-US" smtClean="0"/>
+              <a:rPr lang="en-US"/>
               <a:t>Click to edit Master text styles</a:t>
             </a:r>
           </a:p>
@@ -1569,38 +1572,37 @@
           <a:p>
             <a:pPr lvl="0"/>
             <a:r>
-              <a:rPr lang="en-US" smtClean="0"/>
+              <a:rPr lang="en-US"/>
               <a:t>Click to edit Master text styles</a:t>
             </a:r>
           </a:p>
           <a:p>
             <a:pPr lvl="1"/>
             <a:r>
-              <a:rPr lang="en-US" smtClean="0"/>
+              <a:rPr lang="en-US"/>
               <a:t>Second level</a:t>
             </a:r>
           </a:p>
           <a:p>
             <a:pPr lvl="2"/>
             <a:r>
-              <a:rPr lang="en-US" smtClean="0"/>
+              <a:rPr lang="en-US"/>
               <a:t>Third level</a:t>
             </a:r>
           </a:p>
           <a:p>
             <a:pPr lvl="3"/>
             <a:r>
-              <a:rPr lang="en-US" smtClean="0"/>
+              <a:rPr lang="en-US"/>
               <a:t>Fourth level</a:t>
             </a:r>
           </a:p>
           <a:p>
             <a:pPr lvl="4"/>
             <a:r>
-              <a:rPr lang="en-US" smtClean="0"/>
+              <a:rPr lang="en-US"/>
               <a:t>Fifth level</a:t>
             </a:r>
-            <a:endParaRPr lang="en-US"/>
           </a:p>
         </p:txBody>
       </p:sp>
@@ -1663,7 +1665,7 @@
           <a:p>
             <a:pPr lvl="0"/>
             <a:r>
-              <a:rPr lang="en-US" smtClean="0"/>
+              <a:rPr lang="en-US"/>
               <a:t>Click to edit Master text styles</a:t>
             </a:r>
           </a:p>
@@ -1719,38 +1721,37 @@
           <a:p>
             <a:pPr lvl="0"/>
             <a:r>
-              <a:rPr lang="en-US" smtClean="0"/>
+              <a:rPr lang="en-US"/>
               <a:t>Click to edit Master text styles</a:t>
             </a:r>
           </a:p>
           <a:p>
             <a:pPr lvl="1"/>
             <a:r>
-              <a:rPr lang="en-US" smtClean="0"/>
+              <a:rPr lang="en-US"/>
               <a:t>Second level</a:t>
             </a:r>
           </a:p>
           <a:p>
             <a:pPr lvl="2"/>
             <a:r>
-              <a:rPr lang="en-US" smtClean="0"/>
+              <a:rPr lang="en-US"/>
               <a:t>Third level</a:t>
             </a:r>
           </a:p>
           <a:p>
             <a:pPr lvl="3"/>
             <a:r>
-              <a:rPr lang="en-US" smtClean="0"/>
+              <a:rPr lang="en-US"/>
               <a:t>Fourth level</a:t>
             </a:r>
           </a:p>
           <a:p>
             <a:pPr lvl="4"/>
             <a:r>
-              <a:rPr lang="en-US" smtClean="0"/>
+              <a:rPr lang="en-US"/>
               <a:t>Fifth level</a:t>
             </a:r>
-            <a:endParaRPr lang="en-US"/>
           </a:p>
         </p:txBody>
       </p:sp>
@@ -1771,7 +1772,7 @@
           <a:p>
             <a:fld id="{5BCAD085-E8A6-8845-BD4E-CB4CCA059FC4}" type="datetimeFigureOut">
               <a:rPr lang="en-US" smtClean="0"/>
-              <a:t>1/27/13</a:t>
+              <a:t>7/5/26</a:t>
             </a:fld>
             <a:endParaRPr lang="en-US"/>
           </a:p>
@@ -1865,10 +1866,9 @@
           <a:lstStyle/>
           <a:p>
             <a:r>
-              <a:rPr lang="en-US" smtClean="0"/>
+              <a:rPr lang="en-US"/>
               <a:t>Click to edit Master title style</a:t>
             </a:r>
-            <a:endParaRPr lang="en-US"/>
           </a:p>
         </p:txBody>
       </p:sp>
@@ -1889,7 +1889,7 @@
           <a:p>
             <a:fld id="{5BCAD085-E8A6-8845-BD4E-CB4CCA059FC4}" type="datetimeFigureOut">
               <a:rPr lang="en-US" smtClean="0"/>
-              <a:t>1/27/13</a:t>
+              <a:t>7/5/26</a:t>
             </a:fld>
             <a:endParaRPr lang="en-US"/>
           </a:p>
@@ -1984,7 +1984,7 @@
           <a:p>
             <a:fld id="{5BCAD085-E8A6-8845-BD4E-CB4CCA059FC4}" type="datetimeFigureOut">
               <a:rPr lang="en-US" smtClean="0"/>
-              <a:t>1/27/13</a:t>
+              <a:t>7/5/26</a:t>
             </a:fld>
             <a:endParaRPr lang="en-US"/>
           </a:p>
@@ -2087,10 +2087,9 @@
           </a:lstStyle>
           <a:p>
             <a:r>
-              <a:rPr lang="en-US" smtClean="0"/>
+              <a:rPr lang="en-US"/>
               <a:t>Click to edit Master title style</a:t>
             </a:r>
-            <a:endParaRPr lang="en-US"/>
           </a:p>
         </p:txBody>
       </p:sp>
@@ -2144,38 +2143,37 @@
           <a:p>
             <a:pPr lvl="0"/>
             <a:r>
-              <a:rPr lang="en-US" smtClean="0"/>
+              <a:rPr lang="en-US"/>
               <a:t>Click to edit Master text styles</a:t>
             </a:r>
           </a:p>
           <a:p>
             <a:pPr lvl="1"/>
             <a:r>
-              <a:rPr lang="en-US" smtClean="0"/>
+              <a:rPr lang="en-US"/>
               <a:t>Second level</a:t>
             </a:r>
           </a:p>
           <a:p>
             <a:pPr lvl="2"/>
             <a:r>
-              <a:rPr lang="en-US" smtClean="0"/>
+              <a:rPr lang="en-US"/>
               <a:t>Third level</a:t>
             </a:r>
           </a:p>
           <a:p>
             <a:pPr lvl="3"/>
             <a:r>
-              <a:rPr lang="en-US" smtClean="0"/>
+              <a:rPr lang="en-US"/>
               <a:t>Fourth level</a:t>
             </a:r>
           </a:p>
           <a:p>
             <a:pPr lvl="4"/>
             <a:r>
-              <a:rPr lang="en-US" smtClean="0"/>
+              <a:rPr lang="en-US"/>
               <a:t>Fifth level</a:t>
             </a:r>
-            <a:endParaRPr lang="en-US"/>
           </a:p>
         </p:txBody>
       </p:sp>
@@ -2238,7 +2236,7 @@
           <a:p>
             <a:pPr lvl="0"/>
             <a:r>
-              <a:rPr lang="en-US" smtClean="0"/>
+              <a:rPr lang="en-US"/>
               <a:t>Click to edit Master text styles</a:t>
             </a:r>
           </a:p>
@@ -2261,7 +2259,7 @@
           <a:p>
             <a:fld id="{5BCAD085-E8A6-8845-BD4E-CB4CCA059FC4}" type="datetimeFigureOut">
               <a:rPr lang="en-US" smtClean="0"/>
-              <a:t>1/27/13</a:t>
+              <a:t>7/5/26</a:t>
             </a:fld>
             <a:endParaRPr lang="en-US"/>
           </a:p>
@@ -2364,10 +2362,9 @@
           </a:lstStyle>
           <a:p>
             <a:r>
-              <a:rPr lang="en-US" smtClean="0"/>
+              <a:rPr lang="en-US"/>
               <a:t>Click to edit Master title style</a:t>
             </a:r>
-            <a:endParaRPr lang="en-US"/>
           </a:p>
         </p:txBody>
       </p:sp>
@@ -2491,7 +2488,7 @@
           <a:p>
             <a:pPr lvl="0"/>
             <a:r>
-              <a:rPr lang="en-US" smtClean="0"/>
+              <a:rPr lang="en-US"/>
               <a:t>Click to edit Master text styles</a:t>
             </a:r>
           </a:p>
@@ -2514,7 +2511,7 @@
           <a:p>
             <a:fld id="{5BCAD085-E8A6-8845-BD4E-CB4CCA059FC4}" type="datetimeFigureOut">
               <a:rPr lang="en-US" smtClean="0"/>
-              <a:t>1/27/13</a:t>
+              <a:t>7/5/26</a:t>
             </a:fld>
             <a:endParaRPr lang="en-US"/>
           </a:p>
@@ -2623,10 +2620,9 @@
           <a:lstStyle/>
           <a:p>
             <a:r>
-              <a:rPr lang="en-US" smtClean="0"/>
+              <a:rPr lang="en-US"/>
               <a:t>Click to edit Master title style</a:t>
             </a:r>
-            <a:endParaRPr lang="en-US"/>
           </a:p>
         </p:txBody>
       </p:sp>
@@ -2657,38 +2653,37 @@
           <a:p>
             <a:pPr lvl="0"/>
             <a:r>
-              <a:rPr lang="en-US" smtClean="0"/>
+              <a:rPr lang="en-US"/>
               <a:t>Click to edit Master text styles</a:t>
             </a:r>
           </a:p>
           <a:p>
             <a:pPr lvl="1"/>
             <a:r>
-              <a:rPr lang="en-US" smtClean="0"/>
+              <a:rPr lang="en-US"/>
               <a:t>Second level</a:t>
             </a:r>
           </a:p>
           <a:p>
             <a:pPr lvl="2"/>
             <a:r>
-              <a:rPr lang="en-US" smtClean="0"/>
+              <a:rPr lang="en-US"/>
               <a:t>Third level</a:t>
             </a:r>
           </a:p>
           <a:p>
             <a:pPr lvl="3"/>
             <a:r>
-              <a:rPr lang="en-US" smtClean="0"/>
+              <a:rPr lang="en-US"/>
               <a:t>Fourth level</a:t>
             </a:r>
           </a:p>
           <a:p>
             <a:pPr lvl="4"/>
             <a:r>
-              <a:rPr lang="en-US" smtClean="0"/>
+              <a:rPr lang="en-US"/>
               <a:t>Fifth level</a:t>
             </a:r>
-            <a:endParaRPr lang="en-US"/>
           </a:p>
         </p:txBody>
       </p:sp>
@@ -2727,7 +2722,7 @@
           <a:p>
             <a:fld id="{5BCAD085-E8A6-8845-BD4E-CB4CCA059FC4}" type="datetimeFigureOut">
               <a:rPr lang="en-US" smtClean="0"/>
-              <a:t>1/27/13</a:t>
+              <a:t>7/5/26</a:t>
             </a:fld>
             <a:endParaRPr lang="en-US"/>
           </a:p>
@@ -3086,7 +3081,7 @@
 </file>
 
 <file path=ppt/slides/slide1.xml><?xml version="1.0" encoding="utf-8"?>
-<p:sld xmlns:a="http://schemas.openxmlformats.org/drawingml/2006/main" xmlns:p="http://schemas.openxmlformats.org/presentationml/2006/main" xmlns:r="http://schemas.openxmlformats.org/officeDocument/2006/relationships">
+<p:sld xmlns:a="http://schemas.openxmlformats.org/drawingml/2006/main" xmlns:r="http://schemas.openxmlformats.org/officeDocument/2006/relationships" xmlns:p="http://schemas.openxmlformats.org/presentationml/2006/main">
   <p:cSld>
     <p:spTree>
       <p:nvGrpSpPr>
@@ -3094,7 +3089,14 @@
         <p:cNvGrpSpPr/>
         <p:nvPr/>
       </p:nvGrpSpPr>
-      <p:grpSpPr/>
+      <p:grpSpPr>
+        <a:xfrm>
+          <a:off x="0" y="0"/>
+          <a:ext cx="0" cy="0"/>
+          <a:chOff x="0" y="0"/>
+          <a:chExt cx="0" cy="0"/>
+        </a:xfrm>
+      </p:grpSpPr>
       <p:sp>
         <p:nvSpPr>
           <p:cNvPr id="2" name="TextBox 1"/>
@@ -3103,8 +3105,8 @@
         </p:nvSpPr>
         <p:spPr>
           <a:xfrm>
-            <a:off x="731520" y="2011680"/>
-            <a:ext cx="10698480" cy="2560320"/>
+            <a:off x="391886" y="2037806"/>
+            <a:ext cx="10463348" cy="2031325"/>
           </a:xfrm>
           <a:prstGeom prst="rect">
             <a:avLst/>
@@ -3125,8 +3127,58 @@
               </a:defRPr>
             </a:pPr>
             <a:r>
-              <a:t>Multi-Agent RAG with an Adversarial Heterogeneous Verification Court</a:t>
-            </a:r>
+              <a:rPr dirty="0"/>
+              <a:t>Multi-Agent RAG </a:t>
+            </a:r>
+            <a:r>
+              <a:rPr lang="en-US" sz="3000" b="1" dirty="0"/>
+              <a:t>with </a:t>
+            </a:r>
+            <a:r>
+              <a:rPr lang="en-US" dirty="0"/>
+              <a:t>adversarial</a:t>
+            </a:r>
+            <a:r>
+              <a:rPr lang="en-US" sz="3000" b="1" dirty="0"/>
+              <a:t> </a:t>
+            </a:r>
+            <a:r>
+              <a:rPr lang="en-US" altLang="zh-CN" sz="3200" b="1" dirty="0">
+                <a:solidFill>
+                  <a:srgbClr val="1F3B57"/>
+                </a:solidFill>
+              </a:rPr>
+              <a:t>Retrieval</a:t>
+            </a:r>
+            <a:r>
+              <a:rPr lang="zh-CN" altLang="en-US" sz="3200" b="1" dirty="0">
+                <a:solidFill>
+                  <a:srgbClr val="1F3B57"/>
+                </a:solidFill>
+              </a:rPr>
+              <a:t> </a:t>
+            </a:r>
+            <a:r>
+              <a:rPr lang="en-US" altLang="zh-CN" sz="3200" b="1" dirty="0">
+                <a:solidFill>
+                  <a:srgbClr val="1F3B57"/>
+                </a:solidFill>
+              </a:rPr>
+              <a:t>and</a:t>
+            </a:r>
+            <a:r>
+              <a:rPr lang="zh-CN" altLang="en-US" sz="3200" b="1" dirty="0">
+                <a:solidFill>
+                  <a:srgbClr val="1F3B57"/>
+                </a:solidFill>
+              </a:rPr>
+              <a:t> </a:t>
+            </a:r>
+            <a:r>
+              <a:rPr lang="en-US" sz="3000" dirty="0"/>
+              <a:t>Heterogeneous Verification</a:t>
+            </a:r>
+            <a:endParaRPr lang="en-US" dirty="0"/>
           </a:p>
           <a:p>
             <a:pPr>
@@ -3136,8 +3188,29 @@
                 </a:solidFill>
               </a:defRPr>
             </a:pPr>
-            <a:r>
-              <a:t>Making external-knowledge injection SAFE for clinical True/False question answering</a:t>
+            <a:endParaRPr lang="en-US" dirty="0"/>
+          </a:p>
+          <a:p>
+            <a:pPr>
+              <a:defRPr sz="1700">
+                <a:solidFill>
+                  <a:srgbClr val="555555"/>
+                </a:solidFill>
+              </a:defRPr>
+            </a:pPr>
+            <a:endParaRPr lang="en-US" dirty="0"/>
+          </a:p>
+          <a:p>
+            <a:pPr>
+              <a:defRPr sz="1700">
+                <a:solidFill>
+                  <a:srgbClr val="555555"/>
+                </a:solidFill>
+              </a:defRPr>
+            </a:pPr>
+            <a:r>
+              <a:rPr dirty="0"/>
+              <a:t>Making external-knowledge injection SAFE for clinical question answering</a:t>
             </a:r>
           </a:p>
           <a:p>
@@ -3149,6 +3222,7 @@
               </a:defRPr>
             </a:pPr>
             <a:r>
+              <a:rPr dirty="0"/>
               <a:t>Specialized judge agents + veto arbiter · adversarial retrieval · frozen generator · free APIs · no fine-tuning</a:t>
             </a:r>
           </a:p>
@@ -3163,7 +3237,7 @@
 </file>
 
 <file path=ppt/slides/slide2.xml><?xml version="1.0" encoding="utf-8"?>
-<p:sld xmlns:a="http://schemas.openxmlformats.org/drawingml/2006/main" xmlns:p="http://schemas.openxmlformats.org/presentationml/2006/main" xmlns:r="http://schemas.openxmlformats.org/officeDocument/2006/relationships">
+<p:sld xmlns:a="http://schemas.openxmlformats.org/drawingml/2006/main" xmlns:r="http://schemas.openxmlformats.org/officeDocument/2006/relationships" xmlns:p="http://schemas.openxmlformats.org/presentationml/2006/main">
   <p:cSld>
     <p:spTree>
       <p:nvGrpSpPr>
@@ -3171,7 +3245,14 @@
         <p:cNvGrpSpPr/>
         <p:nvPr/>
       </p:nvGrpSpPr>
-      <p:grpSpPr/>
+      <p:grpSpPr>
+        <a:xfrm>
+          <a:off x="0" y="0"/>
+          <a:ext cx="0" cy="0"/>
+          <a:chOff x="0" y="0"/>
+          <a:chExt cx="0" cy="0"/>
+        </a:xfrm>
+      </p:grpSpPr>
       <p:sp>
         <p:nvSpPr>
           <p:cNvPr id="2" name="TextBox 1"/>
@@ -3181,7 +3262,7 @@
         <p:spPr>
           <a:xfrm>
             <a:off x="457200" y="182880"/>
-            <a:ext cx="11338560" cy="868680"/>
+            <a:ext cx="11338560" cy="477054"/>
           </a:xfrm>
           <a:prstGeom prst="rect">
             <a:avLst/>
@@ -3202,8 +3283,18 @@
               </a:defRPr>
             </a:pPr>
             <a:r>
-              <a:t>Motivation — Why a Verification Court?</a:t>
-            </a:r>
+              <a:rPr dirty="0"/>
+              <a:t>Motivation —</a:t>
+            </a:r>
+            <a:r>
+              <a:rPr lang="zh-CN" altLang="en-US" dirty="0"/>
+              <a:t> </a:t>
+            </a:r>
+            <a:r>
+              <a:rPr lang="en-US" sz="2500" b="1" dirty="0"/>
+              <a:t>Why Multi-Stage Gating</a:t>
+            </a:r>
+            <a:endParaRPr dirty="0"/>
           </a:p>
         </p:txBody>
       </p:sp>
@@ -3216,7 +3307,7 @@
         <p:spPr>
           <a:xfrm>
             <a:off x="640080" y="1371600"/>
-            <a:ext cx="10972800" cy="4754880"/>
+            <a:ext cx="10972800" cy="1969770"/>
           </a:xfrm>
           <a:prstGeom prst="rect">
             <a:avLst/>
@@ -3240,6 +3331,7 @@
               </a:defRPr>
             </a:pPr>
             <a:r>
+              <a:rPr dirty="0"/>
               <a:t>• Clinical questions often need knowledge the local KB lacks → we must inject EXTERNAL evidence</a:t>
             </a:r>
           </a:p>
@@ -3251,7 +3343,8 @@
               <a:defRPr sz="1500" b="0"/>
             </a:pPr>
             <a:r>
-              <a:t>• But naive supplementation (search → append → generate) is unsafe on True/False:</a:t>
+              <a:rPr dirty="0"/>
+              <a:t>• But naive supplementation (search → append → generate) is unsafe:</a:t>
             </a:r>
           </a:p>
           <a:p>
@@ -3262,6 +3355,7 @@
               <a:defRPr sz="1400" b="0"/>
             </a:pPr>
             <a:r>
+              <a:rPr dirty="0"/>
               <a:t>     – Confirmation bias: search 'recovery' → the engine returns recovery content (false support)</a:t>
             </a:r>
           </a:p>
@@ -3273,6 +3367,7 @@
               <a:defRPr sz="1400" b="0"/>
             </a:pPr>
             <a:r>
+              <a:rPr dirty="0"/>
               <a:t>     – Semantic drift: evidence about a broad class ('dementia') 'supports' a claim about a subtype ('Alzheimer's')</a:t>
             </a:r>
           </a:p>
@@ -3284,6 +3379,7 @@
               <a:defRPr sz="1400" b="0"/>
             </a:pPr>
             <a:r>
+              <a:rPr dirty="0"/>
               <a:t>     – Modal swap: evidence says a rule 'helps'; the claim says one 'must' enforce it</a:t>
             </a:r>
           </a:p>
@@ -3299,6 +3395,7 @@
               </a:defRPr>
             </a:pPr>
             <a:r>
+              <a:rPr dirty="0"/>
               <a:t>• Measured: naive external supplementation nets −4 to −5 on 120 TF (churn &gt; fixes)</a:t>
             </a:r>
           </a:p>
@@ -3314,6 +3411,7 @@
               </a:defRPr>
             </a:pPr>
             <a:r>
+              <a:rPr dirty="0"/>
               <a:t>• Goal: a multi-agent architecture that makes external knowledge USABLE — inject facts without churn</a:t>
             </a:r>
           </a:p>
@@ -3328,7 +3426,7 @@
 </file>
 
 <file path=ppt/slides/slide3.xml><?xml version="1.0" encoding="utf-8"?>
-<p:sld xmlns:a="http://schemas.openxmlformats.org/drawingml/2006/main" xmlns:p="http://schemas.openxmlformats.org/presentationml/2006/main" xmlns:r="http://schemas.openxmlformats.org/officeDocument/2006/relationships">
+<p:sld xmlns:a="http://schemas.openxmlformats.org/drawingml/2006/main" xmlns:r="http://schemas.openxmlformats.org/officeDocument/2006/relationships" xmlns:p="http://schemas.openxmlformats.org/presentationml/2006/main">
   <p:cSld>
     <p:spTree>
       <p:nvGrpSpPr>
@@ -3336,7 +3434,14 @@
         <p:cNvGrpSpPr/>
         <p:nvPr/>
       </p:nvGrpSpPr>
-      <p:grpSpPr/>
+      <p:grpSpPr>
+        <a:xfrm>
+          <a:off x="0" y="0"/>
+          <a:ext cx="0" cy="0"/>
+          <a:chOff x="0" y="0"/>
+          <a:chExt cx="0" cy="0"/>
+        </a:xfrm>
+      </p:grpSpPr>
       <p:sp>
         <p:nvSpPr>
           <p:cNvPr id="2" name="TextBox 1"/>
@@ -3345,8 +3450,8 @@
         </p:nvSpPr>
         <p:spPr>
           <a:xfrm>
-            <a:off x="457200" y="182880"/>
-            <a:ext cx="11338560" cy="868680"/>
+            <a:off x="365760" y="109728"/>
+            <a:ext cx="8289192" cy="415498"/>
           </a:xfrm>
           <a:prstGeom prst="rect">
             <a:avLst/>
@@ -3354,58 +3459,588 @@
           <a:noFill/>
         </p:spPr>
         <p:txBody>
-          <a:bodyPr wrap="square">
+          <a:bodyPr wrap="none">
             <a:spAutoFit/>
           </a:bodyPr>
           <a:lstStyle/>
           <a:p>
-            <a:pPr>
-              <a:defRPr sz="2500" b="1">
+            <a:r>
+              <a:rPr sz="2100" b="1" dirty="0">
                 <a:solidFill>
                   <a:srgbClr val="1F3B57"/>
                 </a:solidFill>
-              </a:defRPr>
-            </a:pPr>
-            <a:r>
-              <a:t>Architecture — Eight Agents over a Shared Blackboard</a:t>
-            </a:r>
-          </a:p>
-        </p:txBody>
-      </p:sp>
-      <p:pic>
-        <p:nvPicPr>
-          <p:cNvPr id="3" name="Picture 2" descr="multiagent_v2.png"/>
-          <p:cNvPicPr>
-            <a:picLocks noChangeAspect="1"/>
-          </p:cNvPicPr>
+              </a:rPr>
+              <a:t>Multi-Agent RAG — Adversarial </a:t>
+            </a:r>
+            <a:r>
+              <a:rPr lang="en-US" altLang="zh-CN" sz="2100" b="1" dirty="0">
+                <a:solidFill>
+                  <a:srgbClr val="1F3B57"/>
+                </a:solidFill>
+              </a:rPr>
+              <a:t>Retrieval</a:t>
+            </a:r>
+            <a:r>
+              <a:rPr lang="zh-CN" altLang="en-US" sz="2100" b="1" dirty="0">
+                <a:solidFill>
+                  <a:srgbClr val="1F3B57"/>
+                </a:solidFill>
+              </a:rPr>
+              <a:t> </a:t>
+            </a:r>
+            <a:r>
+              <a:rPr lang="en-US" altLang="zh-CN" sz="2100" b="1" dirty="0">
+                <a:solidFill>
+                  <a:srgbClr val="1F3B57"/>
+                </a:solidFill>
+              </a:rPr>
+              <a:t>and</a:t>
+            </a:r>
+            <a:r>
+              <a:rPr lang="zh-CN" altLang="en-US" sz="2100" b="1" dirty="0">
+                <a:solidFill>
+                  <a:srgbClr val="1F3B57"/>
+                </a:solidFill>
+              </a:rPr>
+              <a:t> </a:t>
+            </a:r>
+            <a:r>
+              <a:rPr sz="2100" b="1" dirty="0">
+                <a:solidFill>
+                  <a:srgbClr val="1F3B57"/>
+                </a:solidFill>
+              </a:rPr>
+              <a:t>Heterogeneous Verification</a:t>
+            </a:r>
+          </a:p>
+        </p:txBody>
+      </p:sp>
+      <p:sp>
+        <p:nvSpPr>
+          <p:cNvPr id="3" name="Rounded Rectangle 2"/>
+          <p:cNvSpPr/>
           <p:nvPr/>
-        </p:nvPicPr>
-        <p:blipFill>
-          <a:blip r:embed="rId2"/>
-          <a:stretch>
-            <a:fillRect/>
-          </a:stretch>
-        </p:blipFill>
+        </p:nvSpPr>
         <p:spPr>
           <a:xfrm>
-            <a:off x="365760" y="1051560"/>
-            <a:ext cx="11475720" cy="6429659"/>
-          </a:xfrm>
-          <a:prstGeom prst="rect">
+            <a:off x="365760" y="658368"/>
+            <a:ext cx="11457432" cy="384048"/>
+          </a:xfrm>
+          <a:prstGeom prst="roundRect">
             <a:avLst/>
           </a:prstGeom>
-        </p:spPr>
-      </p:pic>
-      <p:sp>
-        <p:nvSpPr>
-          <p:cNvPr id="4" name="TextBox 3"/>
+          <a:solidFill>
+            <a:srgbClr val="F9CB9C"/>
+          </a:solidFill>
+          <a:ln w="12700">
+            <a:solidFill>
+              <a:srgbClr val="333333"/>
+            </a:solidFill>
+          </a:ln>
+          <a:effectLst/>
+        </p:spPr>
+        <p:style>
+          <a:lnRef idx="1">
+            <a:schemeClr val="accent1"/>
+          </a:lnRef>
+          <a:fillRef idx="3">
+            <a:schemeClr val="accent1"/>
+          </a:fillRef>
+          <a:effectRef idx="2">
+            <a:schemeClr val="accent1"/>
+          </a:effectRef>
+          <a:fontRef idx="minor">
+            <a:schemeClr val="lt1"/>
+          </a:fontRef>
+        </p:style>
+        <p:txBody>
+          <a:bodyPr wrap="square" lIns="38100" tIns="12700" rIns="38100" bIns="12700" rtlCol="0" anchor="ctr"/>
+          <a:lstStyle/>
+          <a:p>
+            <a:pPr algn="ctr"/>
+            <a:r>
+              <a:rPr sz="950" b="1">
+                <a:solidFill>
+                  <a:srgbClr val="000000"/>
+                </a:solidFill>
+              </a:rPr>
+              <a:t>① Orchestrator Agent — coordinates every step via the shared Blackboard (deterministic loop)</a:t>
+            </a:r>
+          </a:p>
+        </p:txBody>
+      </p:sp>
+      <p:sp>
+        <p:nvSpPr>
+          <p:cNvPr id="4" name="Rounded Rectangle 3"/>
+          <p:cNvSpPr/>
+          <p:nvPr/>
+        </p:nvSpPr>
+        <p:spPr>
+          <a:xfrm>
+            <a:off x="365760" y="1371600"/>
+            <a:ext cx="1005840" cy="731520"/>
+          </a:xfrm>
+          <a:prstGeom prst="roundRect">
+            <a:avLst/>
+          </a:prstGeom>
+          <a:solidFill>
+            <a:srgbClr val="EFEFEF"/>
+          </a:solidFill>
+          <a:ln w="12700">
+            <a:solidFill>
+              <a:srgbClr val="333333"/>
+            </a:solidFill>
+          </a:ln>
+          <a:effectLst/>
+        </p:spPr>
+        <p:style>
+          <a:lnRef idx="1">
+            <a:schemeClr val="accent1"/>
+          </a:lnRef>
+          <a:fillRef idx="3">
+            <a:schemeClr val="accent1"/>
+          </a:fillRef>
+          <a:effectRef idx="2">
+            <a:schemeClr val="accent1"/>
+          </a:effectRef>
+          <a:fontRef idx="minor">
+            <a:schemeClr val="lt1"/>
+          </a:fontRef>
+        </p:style>
+        <p:txBody>
+          <a:bodyPr wrap="square" lIns="38100" tIns="12700" rIns="38100" bIns="12700" rtlCol="0" anchor="ctr"/>
+          <a:lstStyle/>
+          <a:p>
+            <a:pPr algn="ctr"/>
+            <a:r>
+              <a:rPr sz="950" b="1">
+                <a:solidFill>
+                  <a:srgbClr val="000000"/>
+                </a:solidFill>
+              </a:rPr>
+              <a:t>Question</a:t>
+            </a:r>
+          </a:p>
+        </p:txBody>
+      </p:sp>
+      <p:sp>
+        <p:nvSpPr>
+          <p:cNvPr id="5" name="Rounded Rectangle 4"/>
+          <p:cNvSpPr/>
+          <p:nvPr/>
+        </p:nvSpPr>
+        <p:spPr>
+          <a:xfrm>
+            <a:off x="1554480" y="1371600"/>
+            <a:ext cx="1645920" cy="731520"/>
+          </a:xfrm>
+          <a:prstGeom prst="roundRect">
+            <a:avLst/>
+          </a:prstGeom>
+          <a:solidFill>
+            <a:srgbClr val="CFE2F3"/>
+          </a:solidFill>
+          <a:ln w="12700">
+            <a:solidFill>
+              <a:srgbClr val="333333"/>
+            </a:solidFill>
+          </a:ln>
+          <a:effectLst/>
+        </p:spPr>
+        <p:style>
+          <a:lnRef idx="1">
+            <a:schemeClr val="accent1"/>
+          </a:lnRef>
+          <a:fillRef idx="3">
+            <a:schemeClr val="accent1"/>
+          </a:fillRef>
+          <a:effectRef idx="2">
+            <a:schemeClr val="accent1"/>
+          </a:effectRef>
+          <a:fontRef idx="minor">
+            <a:schemeClr val="lt1"/>
+          </a:fontRef>
+        </p:style>
+        <p:txBody>
+          <a:bodyPr wrap="square" lIns="38100" tIns="12700" rIns="38100" bIns="12700" rtlCol="0" anchor="ctr"/>
+          <a:lstStyle/>
+          <a:p>
+            <a:pPr algn="ctr"/>
+            <a:r>
+              <a:rPr sz="950" b="1">
+                <a:solidFill>
+                  <a:srgbClr val="000000"/>
+                </a:solidFill>
+              </a:rPr>
+              <a:t>② Query Agent</a:t>
+            </a:r>
+          </a:p>
+          <a:p>
+            <a:pPr algn="ctr"/>
+            <a:r>
+              <a:rPr sz="800" b="0">
+                <a:solidFill>
+                  <a:srgbClr val="000000"/>
+                </a:solidFill>
+              </a:rPr>
+              <a:t>rewrite + pro/con</a:t>
+            </a:r>
+          </a:p>
+        </p:txBody>
+      </p:sp>
+      <p:sp>
+        <p:nvSpPr>
+          <p:cNvPr id="6" name="Rounded Rectangle 5"/>
+          <p:cNvSpPr/>
+          <p:nvPr/>
+        </p:nvSpPr>
+        <p:spPr>
+          <a:xfrm>
+            <a:off x="3383280" y="1371600"/>
+            <a:ext cx="1828800" cy="731520"/>
+          </a:xfrm>
+          <a:prstGeom prst="roundRect">
+            <a:avLst/>
+          </a:prstGeom>
+          <a:solidFill>
+            <a:srgbClr val="CFE2F3"/>
+          </a:solidFill>
+          <a:ln w="12700">
+            <a:solidFill>
+              <a:srgbClr val="333333"/>
+            </a:solidFill>
+          </a:ln>
+          <a:effectLst/>
+        </p:spPr>
+        <p:style>
+          <a:lnRef idx="1">
+            <a:schemeClr val="accent1"/>
+          </a:lnRef>
+          <a:fillRef idx="3">
+            <a:schemeClr val="accent1"/>
+          </a:fillRef>
+          <a:effectRef idx="2">
+            <a:schemeClr val="accent1"/>
+          </a:effectRef>
+          <a:fontRef idx="minor">
+            <a:schemeClr val="lt1"/>
+          </a:fontRef>
+        </p:style>
+        <p:txBody>
+          <a:bodyPr wrap="square" lIns="38100" tIns="12700" rIns="38100" bIns="12700" rtlCol="0" anchor="ctr"/>
+          <a:lstStyle/>
+          <a:p>
+            <a:pPr algn="ctr"/>
+            <a:r>
+              <a:rPr sz="950" b="1">
+                <a:solidFill>
+                  <a:srgbClr val="000000"/>
+                </a:solidFill>
+              </a:rPr>
+              <a:t>③ Retrieval Team</a:t>
+            </a:r>
+          </a:p>
+          <a:p>
+            <a:pPr algn="ctr"/>
+            <a:r>
+              <a:rPr sz="800" b="0">
+                <a:solidFill>
+                  <a:srgbClr val="000000"/>
+                </a:solidFill>
+              </a:rPr>
+              <a:t>BM25+dense · rerank · noise</a:t>
+            </a:r>
+          </a:p>
+        </p:txBody>
+      </p:sp>
+      <p:sp>
+        <p:nvSpPr>
+          <p:cNvPr id="7" name="Rounded Rectangle 6"/>
+          <p:cNvSpPr/>
+          <p:nvPr/>
+        </p:nvSpPr>
+        <p:spPr>
+          <a:xfrm>
+            <a:off x="5394960" y="1371600"/>
+            <a:ext cx="1920240" cy="731520"/>
+          </a:xfrm>
+          <a:prstGeom prst="roundRect">
+            <a:avLst/>
+          </a:prstGeom>
+          <a:solidFill>
+            <a:srgbClr val="FCE5CD"/>
+          </a:solidFill>
+          <a:ln w="12700">
+            <a:solidFill>
+              <a:srgbClr val="333333"/>
+            </a:solidFill>
+          </a:ln>
+          <a:effectLst/>
+        </p:spPr>
+        <p:style>
+          <a:lnRef idx="1">
+            <a:schemeClr val="accent1"/>
+          </a:lnRef>
+          <a:fillRef idx="3">
+            <a:schemeClr val="accent1"/>
+          </a:fillRef>
+          <a:effectRef idx="2">
+            <a:schemeClr val="accent1"/>
+          </a:effectRef>
+          <a:fontRef idx="minor">
+            <a:schemeClr val="lt1"/>
+          </a:fontRef>
+        </p:style>
+        <p:txBody>
+          <a:bodyPr wrap="square" lIns="38100" tIns="12700" rIns="38100" bIns="12700" rtlCol="0" anchor="ctr"/>
+          <a:lstStyle/>
+          <a:p>
+            <a:pPr algn="ctr"/>
+            <a:r>
+              <a:rPr sz="950" b="1">
+                <a:solidFill>
+                  <a:srgbClr val="000000"/>
+                </a:solidFill>
+              </a:rPr>
+              <a:t>④ Sufficiency (ItV)</a:t>
+            </a:r>
+          </a:p>
+          <a:p>
+            <a:pPr algn="ctr"/>
+            <a:r>
+              <a:rPr sz="800" b="0">
+                <a:solidFill>
+                  <a:srgbClr val="000000"/>
+                </a:solidFill>
+              </a:rPr>
+              <a:t>5×Identify + Verify</a:t>
+            </a:r>
+          </a:p>
+        </p:txBody>
+      </p:sp>
+      <p:sp>
+        <p:nvSpPr>
+          <p:cNvPr id="8" name="Rounded Rectangle 7"/>
+          <p:cNvSpPr/>
+          <p:nvPr/>
+        </p:nvSpPr>
+        <p:spPr>
+          <a:xfrm>
+            <a:off x="5394960" y="2377440"/>
+            <a:ext cx="1920240" cy="640080"/>
+          </a:xfrm>
+          <a:prstGeom prst="roundRect">
+            <a:avLst/>
+          </a:prstGeom>
+          <a:solidFill>
+            <a:srgbClr val="D9EAD3"/>
+          </a:solidFill>
+          <a:ln w="12700">
+            <a:solidFill>
+              <a:srgbClr val="333333"/>
+            </a:solidFill>
+          </a:ln>
+          <a:effectLst/>
+        </p:spPr>
+        <p:style>
+          <a:lnRef idx="1">
+            <a:schemeClr val="accent1"/>
+          </a:lnRef>
+          <a:fillRef idx="3">
+            <a:schemeClr val="accent1"/>
+          </a:fillRef>
+          <a:effectRef idx="2">
+            <a:schemeClr val="accent1"/>
+          </a:effectRef>
+          <a:fontRef idx="minor">
+            <a:schemeClr val="lt1"/>
+          </a:fontRef>
+        </p:style>
+        <p:txBody>
+          <a:bodyPr wrap="square" lIns="38100" tIns="12700" rIns="38100" bIns="12700" rtlCol="0" anchor="ctr"/>
+          <a:lstStyle/>
+          <a:p>
+            <a:pPr algn="ctr"/>
+            <a:r>
+              <a:rPr sz="900" b="1">
+                <a:solidFill>
+                  <a:srgbClr val="000000"/>
+                </a:solidFill>
+              </a:rPr>
+              <a:t>⑤ Local-Completion</a:t>
+            </a:r>
+          </a:p>
+          <a:p>
+            <a:pPr algn="ctr"/>
+            <a:r>
+              <a:rPr sz="750" b="0">
+                <a:solidFill>
+                  <a:srgbClr val="000000"/>
+                </a:solidFill>
+              </a:rPr>
+              <a:t>gap-local re-search</a:t>
+            </a:r>
+          </a:p>
+        </p:txBody>
+      </p:sp>
+      <p:cxnSp>
+        <p:nvCxnSpPr>
+          <p:cNvPr id="9" name="Connector 8"/>
+          <p:cNvCxnSpPr/>
+          <p:nvPr/>
+        </p:nvCxnSpPr>
+        <p:spPr>
+          <a:xfrm>
+            <a:off x="1371600" y="1737360"/>
+            <a:ext cx="182880" cy="0"/>
+          </a:xfrm>
+          <a:prstGeom prst="line">
+            <a:avLst/>
+          </a:prstGeom>
+          <a:ln w="19050">
+            <a:solidFill>
+              <a:srgbClr val="333333"/>
+            </a:solidFill>
+            <a:tailEnd type="triangle" w="med" len="med"/>
+          </a:ln>
+          <a:effectLst/>
+        </p:spPr>
+        <p:style>
+          <a:lnRef idx="2">
+            <a:schemeClr val="accent1"/>
+          </a:lnRef>
+          <a:fillRef idx="0">
+            <a:schemeClr val="accent1"/>
+          </a:fillRef>
+          <a:effectRef idx="1">
+            <a:schemeClr val="accent1"/>
+          </a:effectRef>
+          <a:fontRef idx="minor">
+            <a:schemeClr val="tx1"/>
+          </a:fontRef>
+        </p:style>
+      </p:cxnSp>
+      <p:cxnSp>
+        <p:nvCxnSpPr>
+          <p:cNvPr id="10" name="Connector 9"/>
+          <p:cNvCxnSpPr/>
+          <p:nvPr/>
+        </p:nvCxnSpPr>
+        <p:spPr>
+          <a:xfrm>
+            <a:off x="3200400" y="1737360"/>
+            <a:ext cx="182880" cy="0"/>
+          </a:xfrm>
+          <a:prstGeom prst="line">
+            <a:avLst/>
+          </a:prstGeom>
+          <a:ln w="19050">
+            <a:solidFill>
+              <a:srgbClr val="333333"/>
+            </a:solidFill>
+            <a:tailEnd type="triangle" w="med" len="med"/>
+          </a:ln>
+          <a:effectLst/>
+        </p:spPr>
+        <p:style>
+          <a:lnRef idx="2">
+            <a:schemeClr val="accent1"/>
+          </a:lnRef>
+          <a:fillRef idx="0">
+            <a:schemeClr val="accent1"/>
+          </a:fillRef>
+          <a:effectRef idx="1">
+            <a:schemeClr val="accent1"/>
+          </a:effectRef>
+          <a:fontRef idx="minor">
+            <a:schemeClr val="tx1"/>
+          </a:fontRef>
+        </p:style>
+      </p:cxnSp>
+      <p:cxnSp>
+        <p:nvCxnSpPr>
+          <p:cNvPr id="11" name="Connector 10"/>
+          <p:cNvCxnSpPr/>
+          <p:nvPr/>
+        </p:nvCxnSpPr>
+        <p:spPr>
+          <a:xfrm>
+            <a:off x="5212080" y="1737360"/>
+            <a:ext cx="182880" cy="0"/>
+          </a:xfrm>
+          <a:prstGeom prst="line">
+            <a:avLst/>
+          </a:prstGeom>
+          <a:ln w="19050">
+            <a:solidFill>
+              <a:srgbClr val="333333"/>
+            </a:solidFill>
+            <a:tailEnd type="triangle" w="med" len="med"/>
+          </a:ln>
+          <a:effectLst/>
+        </p:spPr>
+        <p:style>
+          <a:lnRef idx="2">
+            <a:schemeClr val="accent1"/>
+          </a:lnRef>
+          <a:fillRef idx="0">
+            <a:schemeClr val="accent1"/>
+          </a:fillRef>
+          <a:effectRef idx="1">
+            <a:schemeClr val="accent1"/>
+          </a:effectRef>
+          <a:fontRef idx="minor">
+            <a:schemeClr val="tx1"/>
+          </a:fontRef>
+        </p:style>
+      </p:cxnSp>
+      <p:cxnSp>
+        <p:nvCxnSpPr>
+          <p:cNvPr id="12" name="Connector 11"/>
+          <p:cNvCxnSpPr/>
+          <p:nvPr/>
+        </p:nvCxnSpPr>
+        <p:spPr>
+          <a:xfrm>
+            <a:off x="6355080" y="2103120"/>
+            <a:ext cx="0" cy="274320"/>
+          </a:xfrm>
+          <a:prstGeom prst="line">
+            <a:avLst/>
+          </a:prstGeom>
+          <a:ln w="19050">
+            <a:solidFill>
+              <a:srgbClr val="333333"/>
+            </a:solidFill>
+            <a:tailEnd type="triangle" w="med" len="med"/>
+          </a:ln>
+          <a:effectLst/>
+        </p:spPr>
+        <p:style>
+          <a:lnRef idx="2">
+            <a:schemeClr val="accent1"/>
+          </a:lnRef>
+          <a:fillRef idx="0">
+            <a:schemeClr val="accent1"/>
+          </a:fillRef>
+          <a:effectRef idx="1">
+            <a:schemeClr val="accent1"/>
+          </a:effectRef>
+          <a:fontRef idx="minor">
+            <a:schemeClr val="tx1"/>
+          </a:fontRef>
+        </p:style>
+      </p:cxnSp>
+      <p:sp>
+        <p:nvSpPr>
+          <p:cNvPr id="13" name="TextBox 12"/>
           <p:cNvSpPr txBox="1"/>
           <p:nvPr/>
         </p:nvSpPr>
         <p:spPr>
           <a:xfrm>
-            <a:off x="548640" y="5989320"/>
-            <a:ext cx="11155680" cy="731520"/>
+            <a:off x="6446520" y="2148840"/>
+            <a:ext cx="2194560" cy="274320"/>
           </a:xfrm>
           <a:prstGeom prst="rect">
             <a:avLst/>
@@ -3413,19 +4048,1250 @@
           <a:noFill/>
         </p:spPr>
         <p:txBody>
-          <a:bodyPr wrap="square">
+          <a:bodyPr wrap="none">
             <a:spAutoFit/>
           </a:bodyPr>
           <a:lstStyle/>
           <a:p>
-            <a:pPr>
-              <a:spcAft>
-                <a:spcPts val="400"/>
-              </a:spcAft>
-              <a:defRPr sz="1200" b="0"/>
-            </a:pPr>
-            <a:r>
-              <a:t>• Orchestrator routes each question; TF answers are adversarially verified by a heterogeneous court before overriding the local baseline</a:t>
+            <a:r>
+              <a:rPr sz="800" i="1">
+                <a:solidFill>
+                  <a:srgbClr val="B45F06"/>
+                </a:solidFill>
+              </a:rPr>
+              <a:t>insufficient</a:t>
+            </a:r>
+          </a:p>
+        </p:txBody>
+      </p:sp>
+      <p:sp>
+        <p:nvSpPr>
+          <p:cNvPr id="14" name="Rounded Rectangle 13"/>
+          <p:cNvSpPr/>
+          <p:nvPr/>
+        </p:nvSpPr>
+        <p:spPr>
+          <a:xfrm>
+            <a:off x="365760" y="3611880"/>
+            <a:ext cx="2651760" cy="914400"/>
+          </a:xfrm>
+          <a:prstGeom prst="roundRect">
+            <a:avLst/>
+          </a:prstGeom>
+          <a:solidFill>
+            <a:srgbClr val="D9D2E9"/>
+          </a:solidFill>
+          <a:ln w="12700">
+            <a:solidFill>
+              <a:srgbClr val="333333"/>
+            </a:solidFill>
+          </a:ln>
+          <a:effectLst/>
+        </p:spPr>
+        <p:style>
+          <a:lnRef idx="1">
+            <a:schemeClr val="accent1"/>
+          </a:lnRef>
+          <a:fillRef idx="3">
+            <a:schemeClr val="accent1"/>
+          </a:fillRef>
+          <a:effectRef idx="2">
+            <a:schemeClr val="accent1"/>
+          </a:effectRef>
+          <a:fontRef idx="minor">
+            <a:schemeClr val="lt1"/>
+          </a:fontRef>
+        </p:style>
+        <p:txBody>
+          <a:bodyPr wrap="square" lIns="38100" tIns="12700" rIns="38100" bIns="12700" rtlCol="0" anchor="ctr"/>
+          <a:lstStyle/>
+          <a:p>
+            <a:pPr algn="ctr"/>
+            <a:r>
+              <a:rPr sz="900" b="1">
+                <a:solidFill>
+                  <a:srgbClr val="000000"/>
+                </a:solidFill>
+              </a:rPr>
+              <a:t>⑥ Adversarial Web-Research</a:t>
+            </a:r>
+          </a:p>
+          <a:p>
+            <a:pPr algn="ctr"/>
+            <a:r>
+              <a:rPr sz="750" b="0">
+                <a:solidFill>
+                  <a:srgbClr val="000000"/>
+                </a:solidFill>
+              </a:rPr>
+              <a:t>Seek_Support (pro) + Seek_Refute (con)</a:t>
+            </a:r>
+          </a:p>
+          <a:p>
+            <a:pPr algn="ctr"/>
+            <a:r>
+              <a:rPr sz="750" b="0">
+                <a:solidFill>
+                  <a:srgbClr val="000000"/>
+                </a:solidFill>
+              </a:rPr>
+              <a:t>Exa (clean web) + Europe PMC (medical)</a:t>
+            </a:r>
+          </a:p>
+        </p:txBody>
+      </p:sp>
+      <p:sp>
+        <p:nvSpPr>
+          <p:cNvPr id="15" name="Rounded Rectangle 14"/>
+          <p:cNvSpPr/>
+          <p:nvPr/>
+        </p:nvSpPr>
+        <p:spPr>
+          <a:xfrm>
+            <a:off x="3246120" y="3383280"/>
+            <a:ext cx="3977639" cy="1874519"/>
+          </a:xfrm>
+          <a:prstGeom prst="roundRect">
+            <a:avLst/>
+          </a:prstGeom>
+          <a:solidFill>
+            <a:srgbClr val="FFF7DD"/>
+          </a:solidFill>
+          <a:ln w="20320">
+            <a:solidFill>
+              <a:srgbClr val="B45F06"/>
+            </a:solidFill>
+          </a:ln>
+          <a:effectLst/>
+        </p:spPr>
+        <p:style>
+          <a:lnRef idx="1">
+            <a:schemeClr val="accent1"/>
+          </a:lnRef>
+          <a:fillRef idx="3">
+            <a:schemeClr val="accent1"/>
+          </a:fillRef>
+          <a:effectRef idx="2">
+            <a:schemeClr val="accent1"/>
+          </a:effectRef>
+          <a:fontRef idx="minor">
+            <a:schemeClr val="lt1"/>
+          </a:fontRef>
+        </p:style>
+        <p:txBody>
+          <a:bodyPr wrap="square" lIns="38100" tIns="12700" rIns="38100" bIns="12700" rtlCol="0" anchor="ctr"/>
+          <a:lstStyle/>
+          <a:p>
+            <a:pPr algn="ctr"/>
+            <a:endParaRPr/>
+          </a:p>
+        </p:txBody>
+      </p:sp>
+      <p:sp>
+        <p:nvSpPr>
+          <p:cNvPr id="16" name="TextBox 15"/>
+          <p:cNvSpPr txBox="1"/>
+          <p:nvPr/>
+        </p:nvSpPr>
+        <p:spPr>
+          <a:xfrm>
+            <a:off x="4117486" y="3410712"/>
+            <a:ext cx="2234906" cy="238527"/>
+          </a:xfrm>
+          <a:prstGeom prst="rect">
+            <a:avLst/>
+          </a:prstGeom>
+          <a:noFill/>
+        </p:spPr>
+        <p:txBody>
+          <a:bodyPr wrap="none">
+            <a:spAutoFit/>
+          </a:bodyPr>
+          <a:lstStyle/>
+          <a:p>
+            <a:pPr algn="ctr"/>
+            <a:r>
+              <a:rPr sz="950" b="1" dirty="0">
+                <a:solidFill>
+                  <a:srgbClr val="B45F06"/>
+                </a:solidFill>
+              </a:rPr>
+              <a:t>⑦ Heterogeneous Verification (TF only)</a:t>
+            </a:r>
+          </a:p>
+        </p:txBody>
+      </p:sp>
+      <p:sp>
+        <p:nvSpPr>
+          <p:cNvPr id="17" name="Rounded Rectangle 16"/>
+          <p:cNvSpPr/>
+          <p:nvPr/>
+        </p:nvSpPr>
+        <p:spPr>
+          <a:xfrm>
+            <a:off x="3383280" y="3685032"/>
+            <a:ext cx="3703320" cy="365760"/>
+          </a:xfrm>
+          <a:prstGeom prst="roundRect">
+            <a:avLst/>
+          </a:prstGeom>
+          <a:solidFill>
+            <a:srgbClr val="FFD966"/>
+          </a:solidFill>
+          <a:ln w="12700">
+            <a:solidFill>
+              <a:srgbClr val="333333"/>
+            </a:solidFill>
+          </a:ln>
+          <a:effectLst/>
+        </p:spPr>
+        <p:style>
+          <a:lnRef idx="1">
+            <a:schemeClr val="accent1"/>
+          </a:lnRef>
+          <a:fillRef idx="3">
+            <a:schemeClr val="accent1"/>
+          </a:fillRef>
+          <a:effectRef idx="2">
+            <a:schemeClr val="accent1"/>
+          </a:effectRef>
+          <a:fontRef idx="minor">
+            <a:schemeClr val="lt1"/>
+          </a:fontRef>
+        </p:style>
+        <p:txBody>
+          <a:bodyPr wrap="square" lIns="38100" tIns="12700" rIns="38100" bIns="12700" rtlCol="0" anchor="ctr"/>
+          <a:lstStyle/>
+          <a:p>
+            <a:pPr algn="ctr"/>
+            <a:r>
+              <a:rPr sz="830" b="0">
+                <a:solidFill>
+                  <a:srgbClr val="000000"/>
+                </a:solidFill>
+              </a:rPr>
+              <a:t>Entity Judge — ontology boundary · single call</a:t>
+            </a:r>
+          </a:p>
+        </p:txBody>
+      </p:sp>
+      <p:sp>
+        <p:nvSpPr>
+          <p:cNvPr id="18" name="Rounded Rectangle 17"/>
+          <p:cNvSpPr/>
+          <p:nvPr/>
+        </p:nvSpPr>
+        <p:spPr>
+          <a:xfrm>
+            <a:off x="3383280" y="4078224"/>
+            <a:ext cx="3703320" cy="365760"/>
+          </a:xfrm>
+          <a:prstGeom prst="roundRect">
+            <a:avLst/>
+          </a:prstGeom>
+          <a:solidFill>
+            <a:srgbClr val="FFD966"/>
+          </a:solidFill>
+          <a:ln w="12700">
+            <a:solidFill>
+              <a:srgbClr val="333333"/>
+            </a:solidFill>
+          </a:ln>
+          <a:effectLst/>
+        </p:spPr>
+        <p:style>
+          <a:lnRef idx="1">
+            <a:schemeClr val="accent1"/>
+          </a:lnRef>
+          <a:fillRef idx="3">
+            <a:schemeClr val="accent1"/>
+          </a:fillRef>
+          <a:effectRef idx="2">
+            <a:schemeClr val="accent1"/>
+          </a:effectRef>
+          <a:fontRef idx="minor">
+            <a:schemeClr val="lt1"/>
+          </a:fontRef>
+        </p:style>
+        <p:txBody>
+          <a:bodyPr wrap="square" lIns="38100" tIns="12700" rIns="38100" bIns="12700" rtlCol="0" anchor="ctr"/>
+          <a:lstStyle/>
+          <a:p>
+            <a:pPr algn="ctr"/>
+            <a:r>
+              <a:rPr sz="830" b="0">
+                <a:solidFill>
+                  <a:srgbClr val="000000"/>
+                </a:solidFill>
+              </a:rPr>
+              <a:t>Modal Judge — must/make vs helps/may · few-shot</a:t>
+            </a:r>
+          </a:p>
+        </p:txBody>
+      </p:sp>
+      <p:sp>
+        <p:nvSpPr>
+          <p:cNvPr id="19" name="Rounded Rectangle 18"/>
+          <p:cNvSpPr/>
+          <p:nvPr/>
+        </p:nvSpPr>
+        <p:spPr>
+          <a:xfrm>
+            <a:off x="3383280" y="4471416"/>
+            <a:ext cx="3703320" cy="420624"/>
+          </a:xfrm>
+          <a:prstGeom prst="roundRect">
+            <a:avLst/>
+          </a:prstGeom>
+          <a:solidFill>
+            <a:srgbClr val="FFD966"/>
+          </a:solidFill>
+          <a:ln w="12700">
+            <a:solidFill>
+              <a:srgbClr val="333333"/>
+            </a:solidFill>
+          </a:ln>
+          <a:effectLst/>
+        </p:spPr>
+        <p:style>
+          <a:lnRef idx="1">
+            <a:schemeClr val="accent1"/>
+          </a:lnRef>
+          <a:fillRef idx="3">
+            <a:schemeClr val="accent1"/>
+          </a:fillRef>
+          <a:effectRef idx="2">
+            <a:schemeClr val="accent1"/>
+          </a:effectRef>
+          <a:fontRef idx="minor">
+            <a:schemeClr val="lt1"/>
+          </a:fontRef>
+        </p:style>
+        <p:txBody>
+          <a:bodyPr wrap="square" lIns="38100" tIns="12700" rIns="38100" bIns="12700" rtlCol="0" anchor="ctr"/>
+          <a:lstStyle/>
+          <a:p>
+            <a:pPr algn="ctr"/>
+            <a:r>
+              <a:rPr sz="830" b="0">
+                <a:solidFill>
+                  <a:srgbClr val="000000"/>
+                </a:solidFill>
+              </a:rPr>
+              <a:t>Fact Judge — 3-vote self-consistency + ontology rule</a:t>
+            </a:r>
+          </a:p>
+        </p:txBody>
+      </p:sp>
+      <p:sp>
+        <p:nvSpPr>
+          <p:cNvPr id="20" name="Rounded Rectangle 19"/>
+          <p:cNvSpPr/>
+          <p:nvPr/>
+        </p:nvSpPr>
+        <p:spPr>
+          <a:xfrm>
+            <a:off x="3383280" y="4919472"/>
+            <a:ext cx="3703320" cy="274320"/>
+          </a:xfrm>
+          <a:prstGeom prst="roundRect">
+            <a:avLst/>
+          </a:prstGeom>
+          <a:solidFill>
+            <a:srgbClr val="F4B8B8"/>
+          </a:solidFill>
+          <a:ln w="12700">
+            <a:solidFill>
+              <a:srgbClr val="333333"/>
+            </a:solidFill>
+          </a:ln>
+          <a:effectLst/>
+        </p:spPr>
+        <p:style>
+          <a:lnRef idx="1">
+            <a:schemeClr val="accent1"/>
+          </a:lnRef>
+          <a:fillRef idx="3">
+            <a:schemeClr val="accent1"/>
+          </a:fillRef>
+          <a:effectRef idx="2">
+            <a:schemeClr val="accent1"/>
+          </a:effectRef>
+          <a:fontRef idx="minor">
+            <a:schemeClr val="lt1"/>
+          </a:fontRef>
+        </p:style>
+        <p:txBody>
+          <a:bodyPr wrap="square" lIns="38100" tIns="12700" rIns="38100" bIns="12700" rtlCol="0" anchor="ctr"/>
+          <a:lstStyle/>
+          <a:p>
+            <a:pPr algn="ctr"/>
+            <a:r>
+              <a:rPr sz="800" b="1">
+                <a:solidFill>
+                  <a:srgbClr val="000000"/>
+                </a:solidFill>
+              </a:rPr>
+              <a:t>Arbiter — VETO: any red flag → INSUFFICIENT</a:t>
+            </a:r>
+          </a:p>
+        </p:txBody>
+      </p:sp>
+      <p:sp>
+        <p:nvSpPr>
+          <p:cNvPr id="21" name="Rounded Rectangle 20"/>
+          <p:cNvSpPr/>
+          <p:nvPr/>
+        </p:nvSpPr>
+        <p:spPr>
+          <a:xfrm>
+            <a:off x="7589520" y="3611880"/>
+            <a:ext cx="1874519" cy="1920240"/>
+          </a:xfrm>
+          <a:prstGeom prst="roundRect">
+            <a:avLst/>
+          </a:prstGeom>
+          <a:solidFill>
+            <a:srgbClr val="B6D7A8"/>
+          </a:solidFill>
+          <a:ln w="12700">
+            <a:solidFill>
+              <a:srgbClr val="333333"/>
+            </a:solidFill>
+          </a:ln>
+          <a:effectLst/>
+        </p:spPr>
+        <p:style>
+          <a:lnRef idx="1">
+            <a:schemeClr val="accent1"/>
+          </a:lnRef>
+          <a:fillRef idx="3">
+            <a:schemeClr val="accent1"/>
+          </a:fillRef>
+          <a:effectRef idx="2">
+            <a:schemeClr val="accent1"/>
+          </a:effectRef>
+          <a:fontRef idx="minor">
+            <a:schemeClr val="lt1"/>
+          </a:fontRef>
+        </p:style>
+        <p:txBody>
+          <a:bodyPr wrap="square" lIns="38100" tIns="12700" rIns="38100" bIns="12700" rtlCol="0" anchor="ctr"/>
+          <a:lstStyle/>
+          <a:p>
+            <a:pPr algn="ctr"/>
+            <a:r>
+              <a:rPr sz="950" b="1">
+                <a:solidFill>
+                  <a:srgbClr val="000000"/>
+                </a:solidFill>
+              </a:rPr>
+              <a:t>⑧ Answer Agent</a:t>
+            </a:r>
+          </a:p>
+          <a:p>
+            <a:pPr algn="ctr"/>
+            <a:r>
+              <a:rPr sz="800" b="0">
+                <a:solidFill>
+                  <a:srgbClr val="000000"/>
+                </a:solidFill>
+              </a:rPr>
+              <a:t>GPT-4</a:t>
+            </a:r>
+          </a:p>
+          <a:p>
+            <a:pPr algn="ctr"/>
+            <a:r>
+              <a:rPr sz="800" b="0">
+                <a:solidFill>
+                  <a:srgbClr val="000000"/>
+                </a:solidFill>
+              </a:rPr>
+              <a:t>(frozen, grounded)</a:t>
+            </a:r>
+          </a:p>
+        </p:txBody>
+      </p:sp>
+      <p:sp>
+        <p:nvSpPr>
+          <p:cNvPr id="22" name="Rounded Rectangle 21"/>
+          <p:cNvSpPr/>
+          <p:nvPr/>
+        </p:nvSpPr>
+        <p:spPr>
+          <a:xfrm>
+            <a:off x="9692640" y="4206240"/>
+            <a:ext cx="1371600" cy="731520"/>
+          </a:xfrm>
+          <a:prstGeom prst="roundRect">
+            <a:avLst/>
+          </a:prstGeom>
+          <a:solidFill>
+            <a:srgbClr val="EFEFEF"/>
+          </a:solidFill>
+          <a:ln w="12700">
+            <a:solidFill>
+              <a:srgbClr val="333333"/>
+            </a:solidFill>
+          </a:ln>
+          <a:effectLst/>
+        </p:spPr>
+        <p:style>
+          <a:lnRef idx="1">
+            <a:schemeClr val="accent1"/>
+          </a:lnRef>
+          <a:fillRef idx="3">
+            <a:schemeClr val="accent1"/>
+          </a:fillRef>
+          <a:effectRef idx="2">
+            <a:schemeClr val="accent1"/>
+          </a:effectRef>
+          <a:fontRef idx="minor">
+            <a:schemeClr val="lt1"/>
+          </a:fontRef>
+        </p:style>
+        <p:txBody>
+          <a:bodyPr wrap="square" lIns="38100" tIns="12700" rIns="38100" bIns="12700" rtlCol="0" anchor="ctr"/>
+          <a:lstStyle/>
+          <a:p>
+            <a:pPr algn="ctr"/>
+            <a:r>
+              <a:rPr sz="1000" b="1">
+                <a:solidFill>
+                  <a:srgbClr val="000000"/>
+                </a:solidFill>
+              </a:rPr>
+              <a:t>Final Answer</a:t>
+            </a:r>
+          </a:p>
+        </p:txBody>
+      </p:sp>
+      <p:cxnSp>
+        <p:nvCxnSpPr>
+          <p:cNvPr id="23" name="Connector 22"/>
+          <p:cNvCxnSpPr/>
+          <p:nvPr/>
+        </p:nvCxnSpPr>
+        <p:spPr>
+          <a:xfrm flipH="1">
+            <a:off x="2011680" y="3017520"/>
+            <a:ext cx="3474720" cy="594360"/>
+          </a:xfrm>
+          <a:prstGeom prst="line">
+            <a:avLst/>
+          </a:prstGeom>
+          <a:ln w="19050">
+            <a:solidFill>
+              <a:srgbClr val="674EA7"/>
+            </a:solidFill>
+            <a:tailEnd type="triangle" w="med" len="med"/>
+          </a:ln>
+          <a:effectLst/>
+        </p:spPr>
+        <p:style>
+          <a:lnRef idx="2">
+            <a:schemeClr val="accent1"/>
+          </a:lnRef>
+          <a:fillRef idx="0">
+            <a:schemeClr val="accent1"/>
+          </a:fillRef>
+          <a:effectRef idx="1">
+            <a:schemeClr val="accent1"/>
+          </a:effectRef>
+          <a:fontRef idx="minor">
+            <a:schemeClr val="tx1"/>
+          </a:fontRef>
+        </p:style>
+      </p:cxnSp>
+      <p:sp>
+        <p:nvSpPr>
+          <p:cNvPr id="24" name="TextBox 23"/>
+          <p:cNvSpPr txBox="1"/>
+          <p:nvPr/>
+        </p:nvSpPr>
+        <p:spPr>
+          <a:xfrm>
+            <a:off x="2926080" y="3063240"/>
+            <a:ext cx="2194560" cy="274320"/>
+          </a:xfrm>
+          <a:prstGeom prst="rect">
+            <a:avLst/>
+          </a:prstGeom>
+          <a:noFill/>
+        </p:spPr>
+        <p:txBody>
+          <a:bodyPr wrap="none">
+            <a:spAutoFit/>
+          </a:bodyPr>
+          <a:lstStyle/>
+          <a:p>
+            <a:r>
+              <a:rPr sz="800" i="1">
+                <a:solidFill>
+                  <a:srgbClr val="674EA7"/>
+                </a:solidFill>
+              </a:rPr>
+              <a:t>external retrieval</a:t>
+            </a:r>
+          </a:p>
+        </p:txBody>
+      </p:sp>
+      <p:cxnSp>
+        <p:nvCxnSpPr>
+          <p:cNvPr id="25" name="Connector 24"/>
+          <p:cNvCxnSpPr/>
+          <p:nvPr/>
+        </p:nvCxnSpPr>
+        <p:spPr>
+          <a:xfrm>
+            <a:off x="3017520" y="4069080"/>
+            <a:ext cx="228600" cy="0"/>
+          </a:xfrm>
+          <a:prstGeom prst="line">
+            <a:avLst/>
+          </a:prstGeom>
+          <a:ln w="19050">
+            <a:solidFill>
+              <a:srgbClr val="333333"/>
+            </a:solidFill>
+            <a:tailEnd type="triangle" w="med" len="med"/>
+          </a:ln>
+          <a:effectLst/>
+        </p:spPr>
+        <p:style>
+          <a:lnRef idx="2">
+            <a:schemeClr val="accent1"/>
+          </a:lnRef>
+          <a:fillRef idx="0">
+            <a:schemeClr val="accent1"/>
+          </a:fillRef>
+          <a:effectRef idx="1">
+            <a:schemeClr val="accent1"/>
+          </a:effectRef>
+          <a:fontRef idx="minor">
+            <a:schemeClr val="tx1"/>
+          </a:fontRef>
+        </p:style>
+      </p:cxnSp>
+      <p:cxnSp>
+        <p:nvCxnSpPr>
+          <p:cNvPr id="26" name="Connector 25"/>
+          <p:cNvCxnSpPr/>
+          <p:nvPr/>
+        </p:nvCxnSpPr>
+        <p:spPr>
+          <a:xfrm>
+            <a:off x="7223760" y="4206240"/>
+            <a:ext cx="365760" cy="0"/>
+          </a:xfrm>
+          <a:prstGeom prst="line">
+            <a:avLst/>
+          </a:prstGeom>
+          <a:ln w="19050">
+            <a:solidFill>
+              <a:srgbClr val="38761D"/>
+            </a:solidFill>
+            <a:tailEnd type="triangle" w="med" len="med"/>
+          </a:ln>
+          <a:effectLst/>
+        </p:spPr>
+        <p:style>
+          <a:lnRef idx="2">
+            <a:schemeClr val="accent1"/>
+          </a:lnRef>
+          <a:fillRef idx="0">
+            <a:schemeClr val="accent1"/>
+          </a:fillRef>
+          <a:effectRef idx="1">
+            <a:schemeClr val="accent1"/>
+          </a:effectRef>
+          <a:fontRef idx="minor">
+            <a:schemeClr val="tx1"/>
+          </a:fontRef>
+        </p:style>
+      </p:cxnSp>
+      <p:sp>
+        <p:nvSpPr>
+          <p:cNvPr id="27" name="TextBox 26"/>
+          <p:cNvSpPr txBox="1"/>
+          <p:nvPr/>
+        </p:nvSpPr>
+        <p:spPr>
+          <a:xfrm>
+            <a:off x="6858000" y="3913632"/>
+            <a:ext cx="2194560" cy="274320"/>
+          </a:xfrm>
+          <a:prstGeom prst="rect">
+            <a:avLst/>
+          </a:prstGeom>
+          <a:noFill/>
+        </p:spPr>
+        <p:txBody>
+          <a:bodyPr wrap="none">
+            <a:spAutoFit/>
+          </a:bodyPr>
+          <a:lstStyle/>
+          <a:p>
+            <a:r>
+              <a:rPr sz="800" i="1">
+                <a:solidFill>
+                  <a:srgbClr val="38761D"/>
+                </a:solidFill>
+              </a:rPr>
+              <a:t>TF: override/keep</a:t>
+            </a:r>
+          </a:p>
+        </p:txBody>
+      </p:sp>
+      <p:cxnSp>
+        <p:nvCxnSpPr>
+          <p:cNvPr id="28" name="Connector 27"/>
+          <p:cNvCxnSpPr/>
+          <p:nvPr/>
+        </p:nvCxnSpPr>
+        <p:spPr>
+          <a:xfrm>
+            <a:off x="1691640" y="4526280"/>
+            <a:ext cx="0" cy="914400"/>
+          </a:xfrm>
+          <a:prstGeom prst="line">
+            <a:avLst/>
+          </a:prstGeom>
+          <a:ln w="19050">
+            <a:solidFill>
+              <a:srgbClr val="B45F06"/>
+            </a:solidFill>
+          </a:ln>
+          <a:effectLst/>
+        </p:spPr>
+        <p:style>
+          <a:lnRef idx="2">
+            <a:schemeClr val="accent1"/>
+          </a:lnRef>
+          <a:fillRef idx="0">
+            <a:schemeClr val="accent1"/>
+          </a:fillRef>
+          <a:effectRef idx="1">
+            <a:schemeClr val="accent1"/>
+          </a:effectRef>
+          <a:fontRef idx="minor">
+            <a:schemeClr val="tx1"/>
+          </a:fontRef>
+        </p:style>
+      </p:cxnSp>
+      <p:cxnSp>
+        <p:nvCxnSpPr>
+          <p:cNvPr id="29" name="Connector 28"/>
+          <p:cNvCxnSpPr/>
+          <p:nvPr/>
+        </p:nvCxnSpPr>
+        <p:spPr>
+          <a:xfrm>
+            <a:off x="1691640" y="5440680"/>
+            <a:ext cx="5897880" cy="0"/>
+          </a:xfrm>
+          <a:prstGeom prst="line">
+            <a:avLst/>
+          </a:prstGeom>
+          <a:ln w="19050">
+            <a:solidFill>
+              <a:srgbClr val="B45F06"/>
+            </a:solidFill>
+            <a:tailEnd type="triangle" w="med" len="med"/>
+          </a:ln>
+          <a:effectLst/>
+        </p:spPr>
+        <p:style>
+          <a:lnRef idx="2">
+            <a:schemeClr val="accent1"/>
+          </a:lnRef>
+          <a:fillRef idx="0">
+            <a:schemeClr val="accent1"/>
+          </a:fillRef>
+          <a:effectRef idx="1">
+            <a:schemeClr val="accent1"/>
+          </a:effectRef>
+          <a:fontRef idx="minor">
+            <a:schemeClr val="tx1"/>
+          </a:fontRef>
+        </p:style>
+      </p:cxnSp>
+      <p:sp>
+        <p:nvSpPr>
+          <p:cNvPr id="30" name="TextBox 29"/>
+          <p:cNvSpPr txBox="1"/>
+          <p:nvPr/>
+        </p:nvSpPr>
+        <p:spPr>
+          <a:xfrm>
+            <a:off x="3840480" y="5230368"/>
+            <a:ext cx="2194560" cy="274320"/>
+          </a:xfrm>
+          <a:prstGeom prst="rect">
+            <a:avLst/>
+          </a:prstGeom>
+          <a:noFill/>
+        </p:spPr>
+        <p:txBody>
+          <a:bodyPr wrap="none">
+            <a:spAutoFit/>
+          </a:bodyPr>
+          <a:lstStyle/>
+          <a:p>
+            <a:r>
+              <a:rPr sz="800" i="1">
+                <a:solidFill>
+                  <a:srgbClr val="B45F06"/>
+                </a:solidFill>
+              </a:rPr>
+              <a:t>MC: bypass court</a:t>
+            </a:r>
+          </a:p>
+        </p:txBody>
+      </p:sp>
+      <p:cxnSp>
+        <p:nvCxnSpPr>
+          <p:cNvPr id="31" name="Connector 30"/>
+          <p:cNvCxnSpPr/>
+          <p:nvPr/>
+        </p:nvCxnSpPr>
+        <p:spPr>
+          <a:xfrm>
+            <a:off x="7315200" y="1737360"/>
+            <a:ext cx="1188720" cy="0"/>
+          </a:xfrm>
+          <a:prstGeom prst="line">
+            <a:avLst/>
+          </a:prstGeom>
+          <a:ln w="19050">
+            <a:solidFill>
+              <a:srgbClr val="38761D"/>
+            </a:solidFill>
+          </a:ln>
+          <a:effectLst/>
+        </p:spPr>
+        <p:style>
+          <a:lnRef idx="2">
+            <a:schemeClr val="accent1"/>
+          </a:lnRef>
+          <a:fillRef idx="0">
+            <a:schemeClr val="accent1"/>
+          </a:fillRef>
+          <a:effectRef idx="1">
+            <a:schemeClr val="accent1"/>
+          </a:effectRef>
+          <a:fontRef idx="minor">
+            <a:schemeClr val="tx1"/>
+          </a:fontRef>
+        </p:style>
+      </p:cxnSp>
+      <p:cxnSp>
+        <p:nvCxnSpPr>
+          <p:cNvPr id="32" name="Connector 31"/>
+          <p:cNvCxnSpPr/>
+          <p:nvPr/>
+        </p:nvCxnSpPr>
+        <p:spPr>
+          <a:xfrm>
+            <a:off x="8503920" y="1737360"/>
+            <a:ext cx="0" cy="1874520"/>
+          </a:xfrm>
+          <a:prstGeom prst="line">
+            <a:avLst/>
+          </a:prstGeom>
+          <a:ln w="19050">
+            <a:solidFill>
+              <a:srgbClr val="38761D"/>
+            </a:solidFill>
+            <a:tailEnd type="triangle" w="med" len="med"/>
+          </a:ln>
+          <a:effectLst/>
+        </p:spPr>
+        <p:style>
+          <a:lnRef idx="2">
+            <a:schemeClr val="accent1"/>
+          </a:lnRef>
+          <a:fillRef idx="0">
+            <a:schemeClr val="accent1"/>
+          </a:fillRef>
+          <a:effectRef idx="1">
+            <a:schemeClr val="accent1"/>
+          </a:effectRef>
+          <a:fontRef idx="minor">
+            <a:schemeClr val="tx1"/>
+          </a:fontRef>
+        </p:style>
+      </p:cxnSp>
+      <p:sp>
+        <p:nvSpPr>
+          <p:cNvPr id="33" name="TextBox 32"/>
+          <p:cNvSpPr txBox="1"/>
+          <p:nvPr/>
+        </p:nvSpPr>
+        <p:spPr>
+          <a:xfrm>
+            <a:off x="7635240" y="1481328"/>
+            <a:ext cx="2194560" cy="274320"/>
+          </a:xfrm>
+          <a:prstGeom prst="rect">
+            <a:avLst/>
+          </a:prstGeom>
+          <a:noFill/>
+        </p:spPr>
+        <p:txBody>
+          <a:bodyPr wrap="none">
+            <a:spAutoFit/>
+          </a:bodyPr>
+          <a:lstStyle/>
+          <a:p>
+            <a:r>
+              <a:rPr sz="800" i="1">
+                <a:solidFill>
+                  <a:srgbClr val="38761D"/>
+                </a:solidFill>
+              </a:rPr>
+              <a:t>sufficient</a:t>
+            </a:r>
+          </a:p>
+        </p:txBody>
+      </p:sp>
+      <p:cxnSp>
+        <p:nvCxnSpPr>
+          <p:cNvPr id="34" name="Connector 33"/>
+          <p:cNvCxnSpPr/>
+          <p:nvPr/>
+        </p:nvCxnSpPr>
+        <p:spPr>
+          <a:xfrm>
+            <a:off x="9464040" y="4572000"/>
+            <a:ext cx="228600" cy="0"/>
+          </a:xfrm>
+          <a:prstGeom prst="line">
+            <a:avLst/>
+          </a:prstGeom>
+          <a:ln w="19050">
+            <a:solidFill>
+              <a:srgbClr val="333333"/>
+            </a:solidFill>
+            <a:tailEnd type="triangle" w="med" len="med"/>
+          </a:ln>
+          <a:effectLst/>
+        </p:spPr>
+        <p:style>
+          <a:lnRef idx="2">
+            <a:schemeClr val="accent1"/>
+          </a:lnRef>
+          <a:fillRef idx="0">
+            <a:schemeClr val="accent1"/>
+          </a:fillRef>
+          <a:effectRef idx="1">
+            <a:schemeClr val="accent1"/>
+          </a:effectRef>
+          <a:fontRef idx="minor">
+            <a:schemeClr val="tx1"/>
+          </a:fontRef>
+        </p:style>
+      </p:cxnSp>
+      <p:sp>
+        <p:nvSpPr>
+          <p:cNvPr id="35" name="Rounded Rectangle 34"/>
+          <p:cNvSpPr/>
+          <p:nvPr/>
+        </p:nvSpPr>
+        <p:spPr>
+          <a:xfrm>
+            <a:off x="365760" y="5806440"/>
+            <a:ext cx="11457432" cy="548640"/>
+          </a:xfrm>
+          <a:prstGeom prst="roundRect">
+            <a:avLst/>
+          </a:prstGeom>
+          <a:solidFill>
+            <a:srgbClr val="E2E2E2"/>
+          </a:solidFill>
+          <a:ln w="17780">
+            <a:solidFill>
+              <a:srgbClr val="1F3B57"/>
+            </a:solidFill>
+          </a:ln>
+          <a:effectLst/>
+        </p:spPr>
+        <p:style>
+          <a:lnRef idx="1">
+            <a:schemeClr val="accent1"/>
+          </a:lnRef>
+          <a:fillRef idx="3">
+            <a:schemeClr val="accent1"/>
+          </a:fillRef>
+          <a:effectRef idx="2">
+            <a:schemeClr val="accent1"/>
+          </a:effectRef>
+          <a:fontRef idx="minor">
+            <a:schemeClr val="lt1"/>
+          </a:fontRef>
+        </p:style>
+        <p:txBody>
+          <a:bodyPr wrap="square" lIns="38100" tIns="12700" rIns="38100" bIns="12700" rtlCol="0" anchor="ctr"/>
+          <a:lstStyle/>
+          <a:p>
+            <a:pPr algn="ctr"/>
+            <a:r>
+              <a:rPr sz="900" b="1">
+                <a:solidFill>
+                  <a:srgbClr val="000000"/>
+                </a:solidFill>
+              </a:rPr>
+              <a:t>Shared Blackboard   question · queries · evidence{local, web_pro, web_con} · baseline_confidence · judge_flags{entity, modal, fact} · final_decision · trace</a:t>
+            </a:r>
+          </a:p>
+        </p:txBody>
+      </p:sp>
+      <p:cxnSp>
+        <p:nvCxnSpPr>
+          <p:cNvPr id="36" name="Connector 35"/>
+          <p:cNvCxnSpPr/>
+          <p:nvPr/>
+        </p:nvCxnSpPr>
+        <p:spPr>
+          <a:xfrm>
+            <a:off x="2377440" y="5623560"/>
+            <a:ext cx="0" cy="182880"/>
+          </a:xfrm>
+          <a:prstGeom prst="line">
+            <a:avLst/>
+          </a:prstGeom>
+          <a:ln w="12700">
+            <a:solidFill>
+              <a:srgbClr val="888888"/>
+            </a:solidFill>
+          </a:ln>
+          <a:effectLst/>
+        </p:spPr>
+        <p:style>
+          <a:lnRef idx="2">
+            <a:schemeClr val="accent1"/>
+          </a:lnRef>
+          <a:fillRef idx="0">
+            <a:schemeClr val="accent1"/>
+          </a:fillRef>
+          <a:effectRef idx="1">
+            <a:schemeClr val="accent1"/>
+          </a:effectRef>
+          <a:fontRef idx="minor">
+            <a:schemeClr val="tx1"/>
+          </a:fontRef>
+        </p:style>
+      </p:cxnSp>
+      <p:cxnSp>
+        <p:nvCxnSpPr>
+          <p:cNvPr id="37" name="Connector 36"/>
+          <p:cNvCxnSpPr/>
+          <p:nvPr/>
+        </p:nvCxnSpPr>
+        <p:spPr>
+          <a:xfrm flipV="1">
+            <a:off x="2377440" y="5623560"/>
+            <a:ext cx="0" cy="182880"/>
+          </a:xfrm>
+          <a:prstGeom prst="line">
+            <a:avLst/>
+          </a:prstGeom>
+          <a:ln w="12700">
+            <a:solidFill>
+              <a:srgbClr val="888888"/>
+            </a:solidFill>
+          </a:ln>
+          <a:effectLst/>
+        </p:spPr>
+        <p:style>
+          <a:lnRef idx="2">
+            <a:schemeClr val="accent1"/>
+          </a:lnRef>
+          <a:fillRef idx="0">
+            <a:schemeClr val="accent1"/>
+          </a:fillRef>
+          <a:effectRef idx="1">
+            <a:schemeClr val="accent1"/>
+          </a:effectRef>
+          <a:fontRef idx="minor">
+            <a:schemeClr val="tx1"/>
+          </a:fontRef>
+        </p:style>
+      </p:cxnSp>
+      <p:cxnSp>
+        <p:nvCxnSpPr>
+          <p:cNvPr id="38" name="Connector 37"/>
+          <p:cNvCxnSpPr/>
+          <p:nvPr/>
+        </p:nvCxnSpPr>
+        <p:spPr>
+          <a:xfrm>
+            <a:off x="6400800" y="5623560"/>
+            <a:ext cx="0" cy="182880"/>
+          </a:xfrm>
+          <a:prstGeom prst="line">
+            <a:avLst/>
+          </a:prstGeom>
+          <a:ln w="12700">
+            <a:solidFill>
+              <a:srgbClr val="888888"/>
+            </a:solidFill>
+          </a:ln>
+          <a:effectLst/>
+        </p:spPr>
+        <p:style>
+          <a:lnRef idx="2">
+            <a:schemeClr val="accent1"/>
+          </a:lnRef>
+          <a:fillRef idx="0">
+            <a:schemeClr val="accent1"/>
+          </a:fillRef>
+          <a:effectRef idx="1">
+            <a:schemeClr val="accent1"/>
+          </a:effectRef>
+          <a:fontRef idx="minor">
+            <a:schemeClr val="tx1"/>
+          </a:fontRef>
+        </p:style>
+      </p:cxnSp>
+      <p:cxnSp>
+        <p:nvCxnSpPr>
+          <p:cNvPr id="39" name="Connector 38"/>
+          <p:cNvCxnSpPr/>
+          <p:nvPr/>
+        </p:nvCxnSpPr>
+        <p:spPr>
+          <a:xfrm flipV="1">
+            <a:off x="6400800" y="5623560"/>
+            <a:ext cx="0" cy="182880"/>
+          </a:xfrm>
+          <a:prstGeom prst="line">
+            <a:avLst/>
+          </a:prstGeom>
+          <a:ln w="12700">
+            <a:solidFill>
+              <a:srgbClr val="888888"/>
+            </a:solidFill>
+          </a:ln>
+          <a:effectLst/>
+        </p:spPr>
+        <p:style>
+          <a:lnRef idx="2">
+            <a:schemeClr val="accent1"/>
+          </a:lnRef>
+          <a:fillRef idx="0">
+            <a:schemeClr val="accent1"/>
+          </a:fillRef>
+          <a:effectRef idx="1">
+            <a:schemeClr val="accent1"/>
+          </a:effectRef>
+          <a:fontRef idx="minor">
+            <a:schemeClr val="tx1"/>
+          </a:fontRef>
+        </p:style>
+      </p:cxnSp>
+      <p:cxnSp>
+        <p:nvCxnSpPr>
+          <p:cNvPr id="40" name="Connector 39"/>
+          <p:cNvCxnSpPr/>
+          <p:nvPr/>
+        </p:nvCxnSpPr>
+        <p:spPr>
+          <a:xfrm>
+            <a:off x="8503920" y="5623560"/>
+            <a:ext cx="0" cy="182880"/>
+          </a:xfrm>
+          <a:prstGeom prst="line">
+            <a:avLst/>
+          </a:prstGeom>
+          <a:ln w="12700">
+            <a:solidFill>
+              <a:srgbClr val="888888"/>
+            </a:solidFill>
+          </a:ln>
+          <a:effectLst/>
+        </p:spPr>
+        <p:style>
+          <a:lnRef idx="2">
+            <a:schemeClr val="accent1"/>
+          </a:lnRef>
+          <a:fillRef idx="0">
+            <a:schemeClr val="accent1"/>
+          </a:fillRef>
+          <a:effectRef idx="1">
+            <a:schemeClr val="accent1"/>
+          </a:effectRef>
+          <a:fontRef idx="minor">
+            <a:schemeClr val="tx1"/>
+          </a:fontRef>
+        </p:style>
+      </p:cxnSp>
+      <p:cxnSp>
+        <p:nvCxnSpPr>
+          <p:cNvPr id="41" name="Connector 40"/>
+          <p:cNvCxnSpPr/>
+          <p:nvPr/>
+        </p:nvCxnSpPr>
+        <p:spPr>
+          <a:xfrm flipV="1">
+            <a:off x="8503920" y="5623560"/>
+            <a:ext cx="0" cy="182880"/>
+          </a:xfrm>
+          <a:prstGeom prst="line">
+            <a:avLst/>
+          </a:prstGeom>
+          <a:ln w="12700">
+            <a:solidFill>
+              <a:srgbClr val="888888"/>
+            </a:solidFill>
+          </a:ln>
+          <a:effectLst/>
+        </p:spPr>
+        <p:style>
+          <a:lnRef idx="2">
+            <a:schemeClr val="accent1"/>
+          </a:lnRef>
+          <a:fillRef idx="0">
+            <a:schemeClr val="accent1"/>
+          </a:fillRef>
+          <a:effectRef idx="1">
+            <a:schemeClr val="accent1"/>
+          </a:effectRef>
+          <a:fontRef idx="minor">
+            <a:schemeClr val="tx1"/>
+          </a:fontRef>
+        </p:style>
+      </p:cxnSp>
+      <p:sp>
+        <p:nvSpPr>
+          <p:cNvPr id="42" name="TextBox 41"/>
+          <p:cNvSpPr txBox="1"/>
+          <p:nvPr/>
+        </p:nvSpPr>
+        <p:spPr>
+          <a:xfrm>
+            <a:off x="457200" y="5577840"/>
+            <a:ext cx="2194560" cy="274320"/>
+          </a:xfrm>
+          <a:prstGeom prst="rect">
+            <a:avLst/>
+          </a:prstGeom>
+          <a:noFill/>
+        </p:spPr>
+        <p:txBody>
+          <a:bodyPr wrap="none">
+            <a:spAutoFit/>
+          </a:bodyPr>
+          <a:lstStyle/>
+          <a:p>
+            <a:r>
+              <a:rPr sz="800" i="1">
+                <a:solidFill>
+                  <a:srgbClr val="888888"/>
+                </a:solidFill>
+              </a:rPr>
+              <a:t>every agent reads / writes ↕</a:t>
             </a:r>
           </a:p>
         </p:txBody>
@@ -3439,7 +5305,7 @@
 </file>
 
 <file path=ppt/slides/slide4.xml><?xml version="1.0" encoding="utf-8"?>
-<p:sld xmlns:a="http://schemas.openxmlformats.org/drawingml/2006/main" xmlns:p="http://schemas.openxmlformats.org/presentationml/2006/main" xmlns:r="http://schemas.openxmlformats.org/officeDocument/2006/relationships">
+<p:sld xmlns:a="http://schemas.openxmlformats.org/drawingml/2006/main" xmlns:r="http://schemas.openxmlformats.org/officeDocument/2006/relationships" xmlns:p="http://schemas.openxmlformats.org/presentationml/2006/main">
   <p:cSld>
     <p:spTree>
       <p:nvGrpSpPr>
@@ -3447,7 +5313,14 @@
         <p:cNvGrpSpPr/>
         <p:nvPr/>
       </p:nvGrpSpPr>
-      <p:grpSpPr/>
+      <p:grpSpPr>
+        <a:xfrm>
+          <a:off x="0" y="0"/>
+          <a:ext cx="0" cy="0"/>
+          <a:chOff x="0" y="0"/>
+          <a:chExt cx="0" cy="0"/>
+        </a:xfrm>
+      </p:grpSpPr>
       <p:sp>
         <p:nvSpPr>
           <p:cNvPr id="2" name="TextBox 1"/>
@@ -3489,7 +5362,13 @@
           <p:cNvGraphicFramePr>
             <a:graphicFrameLocks noGrp="1"/>
           </p:cNvGraphicFramePr>
-          <p:nvPr/>
+          <p:nvPr>
+            <p:extLst>
+              <p:ext uri="{D42A27DB-BD31-4B8C-83A1-F6EECF244321}">
+                <p14:modId xmlns:p14="http://schemas.microsoft.com/office/powerpoint/2010/main" val="3982631534"/>
+              </p:ext>
+            </p:extLst>
+          </p:nvPr>
         </p:nvGraphicFramePr>
         <p:xfrm>
           <a:off x="457200" y="1280160"/>
@@ -3502,9 +5381,27 @@
                 <a:tableStyleId>{5C22544A-7EE6-4342-B048-85BDC9FD1C3A}</a:tableStyleId>
               </a:tblPr>
               <a:tblGrid>
-                <a:gridCol w="2103120"/>
-                <a:gridCol w="4389120"/>
-                <a:gridCol w="4754880"/>
+                <a:gridCol w="2103120">
+                  <a:extLst>
+                    <a:ext uri="{9D8B030D-6E8A-4147-A177-3AD203B41FA5}">
+                      <a16:colId xmlns:a16="http://schemas.microsoft.com/office/drawing/2014/main" val="20000"/>
+                    </a:ext>
+                  </a:extLst>
+                </a:gridCol>
+                <a:gridCol w="4389120">
+                  <a:extLst>
+                    <a:ext uri="{9D8B030D-6E8A-4147-A177-3AD203B41FA5}">
+                      <a16:colId xmlns:a16="http://schemas.microsoft.com/office/drawing/2014/main" val="20001"/>
+                    </a:ext>
+                  </a:extLst>
+                </a:gridCol>
+                <a:gridCol w="4754880">
+                  <a:extLst>
+                    <a:ext uri="{9D8B030D-6E8A-4147-A177-3AD203B41FA5}">
+                      <a16:colId xmlns:a16="http://schemas.microsoft.com/office/drawing/2014/main" val="20002"/>
+                    </a:ext>
+                  </a:extLst>
+                </a:gridCol>
               </a:tblGrid>
               <a:tr h="841248">
                 <a:tc>
@@ -3576,6 +5473,11 @@
                     </a:solidFill>
                   </a:tcPr>
                 </a:tc>
+                <a:extLst>
+                  <a:ext uri="{0D108BD9-81ED-4DB2-BD59-A6C34878D82A}">
+                    <a16:rowId xmlns:a16="http://schemas.microsoft.com/office/drawing/2014/main" val="10000"/>
+                  </a:ext>
+                </a:extLst>
               </a:tr>
               <a:tr h="841248">
                 <a:tc>
@@ -3602,8 +5504,10 @@
                         <a:defRPr sz="1200" b="0"/>
                       </a:pPr>
                       <a:r>
-                        <a:t>Classify TF/MC, route, coordinate, assemble</a:t>
+                        <a:rPr lang="en-US" dirty="0"/>
+                        <a:t>System control hub: classifies question types, routes execution, and manages state.</a:t>
                       </a:r>
+                      <a:endParaRPr dirty="0"/>
                     </a:p>
                   </a:txBody>
                   <a:tcPr/>
@@ -3623,6 +5527,11 @@
                   </a:txBody>
                   <a:tcPr/>
                 </a:tc>
+                <a:extLst>
+                  <a:ext uri="{0D108BD9-81ED-4DB2-BD59-A6C34878D82A}">
+                    <a16:rowId xmlns:a16="http://schemas.microsoft.com/office/drawing/2014/main" val="10001"/>
+                  </a:ext>
+                </a:extLst>
               </a:tr>
               <a:tr h="841248">
                 <a:tc>
@@ -3649,8 +5558,10 @@
                         <a:defRPr sz="1200" b="0"/>
                       </a:pPr>
                       <a:r>
-                        <a:t>Rewrite/decompose; build a pro/con query pair</a:t>
+                        <a:rPr lang="en-US" dirty="0"/>
+                        <a:t>Query rewriting and semantic decomposition for both local and external pathways.</a:t>
                       </a:r>
+                      <a:endParaRPr dirty="0"/>
                     </a:p>
                   </a:txBody>
                   <a:tcPr/>
@@ -3664,12 +5575,49 @@
                         <a:defRPr sz="1200" b="0"/>
                       </a:pPr>
                       <a:r>
-                        <a:t>gpt-4o-mini; one prompt returns a SUPPORT query and a REFUTE query</a:t>
+                        <a:rPr lang="en-US" dirty="0"/>
+                        <a:t>Generates optimized search queries. For external pipelines, it strictly outputs an adversarial query pair (</a:t>
                       </a:r>
+                      <a:r>
+                        <a:rPr lang="en-US" sz="1200" b="0" kern="1200" dirty="0" err="1">
+                          <a:solidFill>
+                            <a:schemeClr val="dk1"/>
+                          </a:solidFill>
+                          <a:latin typeface="+mn-lt"/>
+                          <a:ea typeface="+mn-ea"/>
+                          <a:cs typeface="+mn-cs"/>
+                        </a:rPr>
+                        <a:t>Seek_Support</a:t>
+                      </a:r>
+                      <a:r>
+                        <a:rPr lang="en-US" dirty="0"/>
+                        <a:t> and </a:t>
+                      </a:r>
+                      <a:r>
+                        <a:rPr lang="en-US" sz="1200" b="0" kern="1200" dirty="0" err="1">
+                          <a:solidFill>
+                            <a:schemeClr val="dk1"/>
+                          </a:solidFill>
+                          <a:latin typeface="+mn-lt"/>
+                          <a:ea typeface="+mn-ea"/>
+                          <a:cs typeface="+mn-cs"/>
+                        </a:rPr>
+                        <a:t>Seek_Refute</a:t>
+                      </a:r>
+                      <a:r>
+                        <a:rPr lang="en-US" dirty="0"/>
+                        <a:t>) to preempt confirmation bias.</a:t>
+                      </a:r>
+                      <a:endParaRPr dirty="0"/>
                     </a:p>
                   </a:txBody>
                   <a:tcPr/>
                 </a:tc>
+                <a:extLst>
+                  <a:ext uri="{0D108BD9-81ED-4DB2-BD59-A6C34878D82A}">
+                    <a16:rowId xmlns:a16="http://schemas.microsoft.com/office/drawing/2014/main" val="10002"/>
+                  </a:ext>
+                </a:extLst>
               </a:tr>
               <a:tr h="841248">
                 <a:tc>
@@ -3696,8 +5644,10 @@
                         <a:defRPr sz="1200" b="0"/>
                       </a:pPr>
                       <a:r>
-                        <a:t>Gather local evidence</a:t>
+                        <a:rPr lang="en-US" dirty="0"/>
+                        <a:t>Gathers, filters, and ranks evidence from the local knowledge base (KB).</a:t>
                       </a:r>
+                      <a:endParaRPr dirty="0"/>
                     </a:p>
                   </a:txBody>
                   <a:tcPr/>
@@ -3711,12 +5661,26 @@
                         <a:defRPr sz="1200" b="0"/>
                       </a:pPr>
                       <a:r>
-                        <a:t>Hybrid BM25 (lexical) + dense bge-large (RRF) → KB-noise filter → bge-reranker-v2-m3 cross-encoder → smart-window expansion</a:t>
+                        <a:rPr dirty="0"/>
+                        <a:t>Hybrid BM25 (lexical) + dense </a:t>
+                      </a:r>
+                      <a:r>
+                        <a:rPr dirty="0" err="1"/>
+                        <a:t>bge</a:t>
+                      </a:r>
+                      <a:r>
+                        <a:rPr dirty="0"/>
+                        <a:t>-large (RRF) → KB-noise filter → bge-reranker-v2-m3 cross-encoder → smart-window expansion</a:t>
                       </a:r>
                     </a:p>
                   </a:txBody>
                   <a:tcPr/>
                 </a:tc>
+                <a:extLst>
+                  <a:ext uri="{0D108BD9-81ED-4DB2-BD59-A6C34878D82A}">
+                    <a16:rowId xmlns:a16="http://schemas.microsoft.com/office/drawing/2014/main" val="10003"/>
+                  </a:ext>
+                </a:extLst>
               </a:tr>
               <a:tr h="841248">
                 <a:tc>
@@ -3743,8 +5707,10 @@
                         <a:defRPr sz="1200" b="0"/>
                       </a:pPr>
                       <a:r>
-                        <a:t>Decide if local context is enough → route completion</a:t>
+                        <a:rPr lang="en-US" dirty="0"/>
+                        <a:t>Initial semantic gating: evaluates if the retrieved local context is sufficient.</a:t>
                       </a:r>
+                      <a:endParaRPr dirty="0"/>
                     </a:p>
                   </a:txBody>
                   <a:tcPr/>
@@ -3754,16 +5720,30 @@
                     <a:bodyPr/>
                     <a:lstStyle/>
                     <a:p>
-                      <a:pPr>
-                        <a:defRPr sz="1200" b="0"/>
+                      <a:pPr marL="0" algn="l" defTabSz="457200" rtl="0" eaLnBrk="1" latinLnBrk="0" hangingPunct="1">
+                        <a:buNone/>
+                        <a:defRPr sz="1200" b="1"/>
                       </a:pPr>
                       <a:r>
-                        <a:t>Identify-then-Verify: 5 independent LLM calls name the missing fact → semantic consensus (MiniLM) → attribution Verify. AUC 0.73</a:t>
+                        <a:rPr lang="en-US" sz="1200" b="0" kern="1200" dirty="0">
+                          <a:solidFill>
+                            <a:schemeClr val="dk1"/>
+                          </a:solidFill>
+                          <a:latin typeface="+mn-lt"/>
+                          <a:ea typeface="+mn-ea"/>
+                          <a:cs typeface="+mn-cs"/>
+                        </a:rPr>
+                        <a:t>Identifies specific knowledge gaps. Triggers Agent ⑤ for targeted local completion, or routes to external pipelines if the local KB is entirely deficient.</a:t>
                       </a:r>
                     </a:p>
                   </a:txBody>
-                  <a:tcPr/>
+                  <a:tcPr marL="114300" marR="114300" marT="76200" marB="76200" anchor="ctr"/>
                 </a:tc>
+                <a:extLst>
+                  <a:ext uri="{0D108BD9-81ED-4DB2-BD59-A6C34878D82A}">
+                    <a16:rowId xmlns:a16="http://schemas.microsoft.com/office/drawing/2014/main" val="10004"/>
+                  </a:ext>
+                </a:extLst>
               </a:tr>
             </a:tbl>
           </a:graphicData>
@@ -3778,7 +5758,7 @@
 </file>
 
 <file path=ppt/slides/slide5.xml><?xml version="1.0" encoding="utf-8"?>
-<p:sld xmlns:a="http://schemas.openxmlformats.org/drawingml/2006/main" xmlns:p="http://schemas.openxmlformats.org/presentationml/2006/main" xmlns:r="http://schemas.openxmlformats.org/officeDocument/2006/relationships">
+<p:sld xmlns:a="http://schemas.openxmlformats.org/drawingml/2006/main" xmlns:r="http://schemas.openxmlformats.org/officeDocument/2006/relationships" xmlns:p="http://schemas.openxmlformats.org/presentationml/2006/main">
   <p:cSld>
     <p:spTree>
       <p:nvGrpSpPr>
@@ -3786,7 +5766,14 @@
         <p:cNvGrpSpPr/>
         <p:nvPr/>
       </p:nvGrpSpPr>
-      <p:grpSpPr/>
+      <p:grpSpPr>
+        <a:xfrm>
+          <a:off x="0" y="0"/>
+          <a:ext cx="0" cy="0"/>
+          <a:chOff x="0" y="0"/>
+          <a:chExt cx="0" cy="0"/>
+        </a:xfrm>
+      </p:grpSpPr>
       <p:sp>
         <p:nvSpPr>
           <p:cNvPr id="2" name="TextBox 1"/>
@@ -3828,7 +5815,13 @@
           <p:cNvGraphicFramePr>
             <a:graphicFrameLocks noGrp="1"/>
           </p:cNvGraphicFramePr>
-          <p:nvPr/>
+          <p:nvPr>
+            <p:extLst>
+              <p:ext uri="{D42A27DB-BD31-4B8C-83A1-F6EECF244321}">
+                <p14:modId xmlns:p14="http://schemas.microsoft.com/office/powerpoint/2010/main" val="2764511759"/>
+              </p:ext>
+            </p:extLst>
+          </p:nvPr>
         </p:nvGraphicFramePr>
         <p:xfrm>
           <a:off x="457200" y="1280160"/>
@@ -3841,9 +5834,27 @@
                 <a:tableStyleId>{5C22544A-7EE6-4342-B048-85BDC9FD1C3A}</a:tableStyleId>
               </a:tblPr>
               <a:tblGrid>
-                <a:gridCol w="2103120"/>
-                <a:gridCol w="4389120"/>
-                <a:gridCol w="4754880"/>
+                <a:gridCol w="2103120">
+                  <a:extLst>
+                    <a:ext uri="{9D8B030D-6E8A-4147-A177-3AD203B41FA5}">
+                      <a16:colId xmlns:a16="http://schemas.microsoft.com/office/drawing/2014/main" val="20000"/>
+                    </a:ext>
+                  </a:extLst>
+                </a:gridCol>
+                <a:gridCol w="4389120">
+                  <a:extLst>
+                    <a:ext uri="{9D8B030D-6E8A-4147-A177-3AD203B41FA5}">
+                      <a16:colId xmlns:a16="http://schemas.microsoft.com/office/drawing/2014/main" val="20001"/>
+                    </a:ext>
+                  </a:extLst>
+                </a:gridCol>
+                <a:gridCol w="4754880">
+                  <a:extLst>
+                    <a:ext uri="{9D8B030D-6E8A-4147-A177-3AD203B41FA5}">
+                      <a16:colId xmlns:a16="http://schemas.microsoft.com/office/drawing/2014/main" val="20002"/>
+                    </a:ext>
+                  </a:extLst>
+                </a:gridCol>
               </a:tblGrid>
               <a:tr h="896112">
                 <a:tc>
@@ -3915,6 +5926,11 @@
                     </a:solidFill>
                   </a:tcPr>
                 </a:tc>
+                <a:extLst>
+                  <a:ext uri="{0D108BD9-81ED-4DB2-BD59-A6C34878D82A}">
+                    <a16:rowId xmlns:a16="http://schemas.microsoft.com/office/drawing/2014/main" val="10000"/>
+                  </a:ext>
+                </a:extLst>
               </a:tr>
               <a:tr h="896112">
                 <a:tc>
@@ -3941,8 +5957,10 @@
                         <a:defRPr sz="1200" b="0"/>
                       </a:pPr>
                       <a:r>
-                        <a:t>On insufficiency, re-search the LOCAL KB first (free)</a:t>
+                        <a:rPr lang="en-US" dirty="0"/>
+                        <a:t>Targeted local re-search based on identified missing facts.</a:t>
                       </a:r>
+                      <a:endParaRPr dirty="0"/>
                     </a:p>
                   </a:txBody>
                   <a:tcPr/>
@@ -3956,12 +5974,19 @@
                         <a:defRPr sz="1200" b="0"/>
                       </a:pPr>
                       <a:r>
-                        <a:t>Targeted gap query → hybrid re-retrieve → merge + rerank → re-evaluate; surfaces buried in-KB answers</a:t>
+                        <a:rPr lang="en-US" dirty="0"/>
+                        <a:t>Translates identified knowledge gaps into precise local queries to maximize internal KB utilization before falling back to external sources.</a:t>
                       </a:r>
+                      <a:endParaRPr dirty="0"/>
                     </a:p>
                   </a:txBody>
                   <a:tcPr/>
                 </a:tc>
+                <a:extLst>
+                  <a:ext uri="{0D108BD9-81ED-4DB2-BD59-A6C34878D82A}">
+                    <a16:rowId xmlns:a16="http://schemas.microsoft.com/office/drawing/2014/main" val="10001"/>
+                  </a:ext>
+                </a:extLst>
               </a:tr>
               <a:tr h="896112">
                 <a:tc>
@@ -3988,8 +6013,10 @@
                         <a:defRPr sz="1200" b="0"/>
                       </a:pPr>
                       <a:r>
-                        <a:t>Fetch external evidence WITHOUT confirmation bias</a:t>
+                        <a:rPr lang="en-US" dirty="0"/>
+                        <a:t>Executes adversarial external knowledge acquisition.</a:t>
                       </a:r>
+                      <a:endParaRPr dirty="0"/>
                     </a:p>
                   </a:txBody>
                   <a:tcPr/>
@@ -4003,12 +6030,27 @@
                         <a:defRPr sz="1200" b="0"/>
                       </a:pPr>
                       <a:r>
-                        <a:t>Dual-personality: support-seeking + refutation-seeking queries. Backends: Exa (clean full-context web) + Europe PMC (medical abstracts, no key). Writes web_pro / web_con</a:t>
+                        <a:rPr lang="en-US" b="0" dirty="0"/>
+                        <a:t>Dual-track routing: Uses Europe PMC for rigorous medical facts and </a:t>
                       </a:r>
+                      <a:r>
+                        <a:rPr lang="en-US" b="0" dirty="0" err="1"/>
+                        <a:t>Exa.ai</a:t>
+                      </a:r>
+                      <a:r>
+                        <a:rPr lang="en-US" b="0" dirty="0"/>
+                        <a:t> for general/policy rules. Executes Pro/Con queries in parallel to gather conflicting evidence.</a:t>
+                      </a:r>
+                      <a:endParaRPr b="0" dirty="0"/>
                     </a:p>
                   </a:txBody>
                   <a:tcPr/>
                 </a:tc>
+                <a:extLst>
+                  <a:ext uri="{0D108BD9-81ED-4DB2-BD59-A6C34878D82A}">
+                    <a16:rowId xmlns:a16="http://schemas.microsoft.com/office/drawing/2014/main" val="10002"/>
+                  </a:ext>
+                </a:extLst>
               </a:tr>
               <a:tr h="896112">
                 <a:tc>
@@ -4035,8 +6077,10 @@
                         <a:defRPr sz="1200" b="0"/>
                       </a:pPr>
                       <a:r>
-                        <a:t>Decide if external evidence may override the baseline</a:t>
+                        <a:rPr lang="en-US" dirty="0"/>
+                        <a:t>Strict multi-stage semantic gating to prevent knowledge contamination (0 Churn).</a:t>
                       </a:r>
+                      <a:endParaRPr dirty="0"/>
                     </a:p>
                   </a:txBody>
                   <a:tcPr/>
@@ -4050,12 +6094,19 @@
                         <a:defRPr sz="1200" b="0"/>
                       </a:pPr>
                       <a:r>
-                        <a:t>Heterogeneous judges + veto arbiter (next slide) — the core defense</a:t>
+                        <a:rPr lang="en-US" b="0" dirty="0"/>
+                        <a:t>Heterogeneous Panel: Entity Judge (ontology bounds) + Modal Judge (intensity match) + Fact Judge (3-vote self-consistency). Arbiter enforces a strict ONE-VETO rule to keep the baseline safe.</a:t>
                       </a:r>
+                      <a:endParaRPr b="0" dirty="0"/>
                     </a:p>
                   </a:txBody>
                   <a:tcPr/>
                 </a:tc>
+                <a:extLst>
+                  <a:ext uri="{0D108BD9-81ED-4DB2-BD59-A6C34878D82A}">
+                    <a16:rowId xmlns:a16="http://schemas.microsoft.com/office/drawing/2014/main" val="10003"/>
+                  </a:ext>
+                </a:extLst>
               </a:tr>
               <a:tr h="896112">
                 <a:tc>
@@ -4082,8 +6133,10 @@
                         <a:defRPr sz="1200" b="0"/>
                       </a:pPr>
                       <a:r>
-                        <a:t>Produce the grounded answer</a:t>
+                        <a:rPr lang="en-US" dirty="0"/>
+                        <a:t>Final response generation grounded strictly in the verified Blackboard evidence.</a:t>
                       </a:r>
+                      <a:endParaRPr dirty="0"/>
                     </a:p>
                   </a:txBody>
                   <a:tcPr/>
@@ -4097,12 +6150,19 @@
                         <a:defRPr sz="1200" b="0"/>
                       </a:pPr>
                       <a:r>
-                        <a:t>Frozen GPT-4, strict grounding, temp 0; emits the local-only baseline draft and the final answer</a:t>
+                        <a:rPr lang="en-US" b="0" dirty="0"/>
+                        <a:t>Frozen Generator: Uses a frozen LLM with strict grounding constraints (No fine-tuning). Relies entirely on the verified context to prevent intrinsic hallucinations.</a:t>
                       </a:r>
+                      <a:endParaRPr b="0" dirty="0"/>
                     </a:p>
                   </a:txBody>
                   <a:tcPr/>
                 </a:tc>
+                <a:extLst>
+                  <a:ext uri="{0D108BD9-81ED-4DB2-BD59-A6C34878D82A}">
+                    <a16:rowId xmlns:a16="http://schemas.microsoft.com/office/drawing/2014/main" val="10004"/>
+                  </a:ext>
+                </a:extLst>
               </a:tr>
             </a:tbl>
           </a:graphicData>
@@ -4117,7 +6177,7 @@
 </file>
 
 <file path=ppt/slides/slide6.xml><?xml version="1.0" encoding="utf-8"?>
-<p:sld xmlns:a="http://schemas.openxmlformats.org/drawingml/2006/main" xmlns:p="http://schemas.openxmlformats.org/presentationml/2006/main" xmlns:r="http://schemas.openxmlformats.org/officeDocument/2006/relationships">
+<p:sld xmlns:a="http://schemas.openxmlformats.org/drawingml/2006/main" xmlns:r="http://schemas.openxmlformats.org/officeDocument/2006/relationships" xmlns:p="http://schemas.openxmlformats.org/presentationml/2006/main">
   <p:cSld>
     <p:spTree>
       <p:nvGrpSpPr>
@@ -4125,7 +6185,14 @@
         <p:cNvGrpSpPr/>
         <p:nvPr/>
       </p:nvGrpSpPr>
-      <p:grpSpPr/>
+      <p:grpSpPr>
+        <a:xfrm>
+          <a:off x="0" y="0"/>
+          <a:ext cx="0" cy="0"/>
+          <a:chOff x="0" y="0"/>
+          <a:chExt cx="0" cy="0"/>
+        </a:xfrm>
+      </p:grpSpPr>
       <p:sp>
         <p:nvSpPr>
           <p:cNvPr id="2" name="TextBox 1"/>
@@ -4218,9 +6285,27 @@
                 <a:tableStyleId>{5C22544A-7EE6-4342-B048-85BDC9FD1C3A}</a:tableStyleId>
               </a:tblPr>
               <a:tblGrid>
-                <a:gridCol w="2103120"/>
-                <a:gridCol w="4389120"/>
-                <a:gridCol w="4663440"/>
+                <a:gridCol w="2103120">
+                  <a:extLst>
+                    <a:ext uri="{9D8B030D-6E8A-4147-A177-3AD203B41FA5}">
+                      <a16:colId xmlns:a16="http://schemas.microsoft.com/office/drawing/2014/main" val="20000"/>
+                    </a:ext>
+                  </a:extLst>
+                </a:gridCol>
+                <a:gridCol w="4389120">
+                  <a:extLst>
+                    <a:ext uri="{9D8B030D-6E8A-4147-A177-3AD203B41FA5}">
+                      <a16:colId xmlns:a16="http://schemas.microsoft.com/office/drawing/2014/main" val="20001"/>
+                    </a:ext>
+                  </a:extLst>
+                </a:gridCol>
+                <a:gridCol w="4663440">
+                  <a:extLst>
+                    <a:ext uri="{9D8B030D-6E8A-4147-A177-3AD203B41FA5}">
+                      <a16:colId xmlns:a16="http://schemas.microsoft.com/office/drawing/2014/main" val="20002"/>
+                    </a:ext>
+                  </a:extLst>
+                </a:gridCol>
               </a:tblGrid>
               <a:tr h="548640">
                 <a:tc>
@@ -4292,6 +6377,11 @@
                     </a:solidFill>
                   </a:tcPr>
                 </a:tc>
+                <a:extLst>
+                  <a:ext uri="{0D108BD9-81ED-4DB2-BD59-A6C34878D82A}">
+                    <a16:rowId xmlns:a16="http://schemas.microsoft.com/office/drawing/2014/main" val="10000"/>
+                  </a:ext>
+                </a:extLst>
               </a:tr>
               <a:tr h="548640">
                 <a:tc>
@@ -4339,6 +6429,11 @@
                   </a:txBody>
                   <a:tcPr/>
                 </a:tc>
+                <a:extLst>
+                  <a:ext uri="{0D108BD9-81ED-4DB2-BD59-A6C34878D82A}">
+                    <a16:rowId xmlns:a16="http://schemas.microsoft.com/office/drawing/2014/main" val="10001"/>
+                  </a:ext>
+                </a:extLst>
               </a:tr>
               <a:tr h="548640">
                 <a:tc>
@@ -4386,6 +6481,11 @@
                   </a:txBody>
                   <a:tcPr/>
                 </a:tc>
+                <a:extLst>
+                  <a:ext uri="{0D108BD9-81ED-4DB2-BD59-A6C34878D82A}">
+                    <a16:rowId xmlns:a16="http://schemas.microsoft.com/office/drawing/2014/main" val="10002"/>
+                  </a:ext>
+                </a:extLst>
               </a:tr>
               <a:tr h="548640">
                 <a:tc>
@@ -4433,6 +6533,11 @@
                   </a:txBody>
                   <a:tcPr/>
                 </a:tc>
+                <a:extLst>
+                  <a:ext uri="{0D108BD9-81ED-4DB2-BD59-A6C34878D82A}">
+                    <a16:rowId xmlns:a16="http://schemas.microsoft.com/office/drawing/2014/main" val="10003"/>
+                  </a:ext>
+                </a:extLst>
               </a:tr>
               <a:tr h="548640">
                 <a:tc>
@@ -4480,6 +6585,11 @@
                   </a:txBody>
                   <a:tcPr/>
                 </a:tc>
+                <a:extLst>
+                  <a:ext uri="{0D108BD9-81ED-4DB2-BD59-A6C34878D82A}">
+                    <a16:rowId xmlns:a16="http://schemas.microsoft.com/office/drawing/2014/main" val="10004"/>
+                  </a:ext>
+                </a:extLst>
               </a:tr>
             </a:tbl>
           </a:graphicData>
@@ -4532,7 +6642,7 @@
 </file>
 
 <file path=ppt/slides/slide7.xml><?xml version="1.0" encoding="utf-8"?>
-<p:sld xmlns:a="http://schemas.openxmlformats.org/drawingml/2006/main" xmlns:p="http://schemas.openxmlformats.org/presentationml/2006/main" xmlns:r="http://schemas.openxmlformats.org/officeDocument/2006/relationships">
+<p:sld xmlns:a="http://schemas.openxmlformats.org/drawingml/2006/main" xmlns:r="http://schemas.openxmlformats.org/officeDocument/2006/relationships" xmlns:p="http://schemas.openxmlformats.org/presentationml/2006/main">
   <p:cSld>
     <p:spTree>
       <p:nvGrpSpPr>
@@ -4540,7 +6650,14 @@
         <p:cNvGrpSpPr/>
         <p:nvPr/>
       </p:nvGrpSpPr>
-      <p:grpSpPr/>
+      <p:grpSpPr>
+        <a:xfrm>
+          <a:off x="0" y="0"/>
+          <a:ext cx="0" cy="0"/>
+          <a:chOff x="0" y="0"/>
+          <a:chExt cx="0" cy="0"/>
+        </a:xfrm>
+      </p:grpSpPr>
       <p:sp>
         <p:nvSpPr>
           <p:cNvPr id="2" name="TextBox 1"/>
@@ -4549,7 +6666,7 @@
         </p:nvSpPr>
         <p:spPr>
           <a:xfrm>
-            <a:off x="457200" y="182880"/>
+            <a:off x="457200" y="349431"/>
             <a:ext cx="11338560" cy="868680"/>
           </a:xfrm>
           <a:prstGeom prst="rect">
@@ -4571,6 +6688,7 @@
               </a:defRPr>
             </a:pPr>
             <a:r>
+              <a:rPr dirty="0"/>
               <a:t>Adversarial Retrieval &amp; the Shared Blackboard</a:t>
             </a:r>
           </a:p>
@@ -4584,7 +6702,7 @@
         </p:nvSpPr>
         <p:spPr>
           <a:xfrm>
-            <a:off x="640080" y="1371600"/>
+            <a:off x="457200" y="1227909"/>
             <a:ext cx="10972800" cy="4846320"/>
           </a:xfrm>
           <a:prstGeom prst="rect">
@@ -4609,6 +6727,7 @@
               </a:defRPr>
             </a:pPr>
             <a:r>
+              <a:rPr dirty="0"/>
               <a:t>• Adversarial Web-Research — dual pro/con queries defeat search confirmation bias</a:t>
             </a:r>
           </a:p>
@@ -4620,7 +6739,24 @@
               <a:defRPr sz="1400" b="0"/>
             </a:pPr>
             <a:r>
-              <a:t>     – web_pro + web_con on the blackboard → the court judges amid conflicting evidence, not a one-sided echo</a:t>
+              <a:rPr dirty="0"/>
+              <a:t>     – </a:t>
+            </a:r>
+            <a:r>
+              <a:rPr dirty="0" err="1"/>
+              <a:t>web_pro</a:t>
+            </a:r>
+            <a:r>
+              <a:rPr dirty="0"/>
+              <a:t> + </a:t>
+            </a:r>
+            <a:r>
+              <a:rPr dirty="0" err="1"/>
+              <a:t>web_con</a:t>
+            </a:r>
+            <a:r>
+              <a:rPr dirty="0"/>
+              <a:t> on the blackboard → the court judges amid conflicting evidence, not a one-sided echo</a:t>
             </a:r>
           </a:p>
           <a:p>
@@ -4631,6 +6767,7 @@
               <a:defRPr sz="1400" b="0"/>
             </a:pPr>
             <a:r>
+              <a:rPr dirty="0"/>
               <a:t>     – Free medical + general backends: Europe PMC (no key) surfaces authoritative abstracts; Exa returns clean, full-context web</a:t>
             </a:r>
           </a:p>
@@ -4646,7 +6783,24 @@
               </a:defRPr>
             </a:pPr>
             <a:r>
-              <a:t>• Shared Blackboard (a plain dataclass — transparent &amp; ablatable)</a:t>
+              <a:rPr dirty="0"/>
+              <a:t>• Shared Blackboard (a plain </a:t>
+            </a:r>
+            <a:r>
+              <a:rPr dirty="0" err="1"/>
+              <a:t>dataclass</a:t>
+            </a:r>
+            <a:r>
+              <a:rPr dirty="0"/>
+              <a:t> — transparent &amp; </a:t>
+            </a:r>
+            <a:r>
+              <a:rPr dirty="0" err="1"/>
+              <a:t>ablatable</a:t>
+            </a:r>
+            <a:r>
+              <a:rPr dirty="0"/>
+              <a:t>)</a:t>
             </a:r>
           </a:p>
           <a:p>
@@ -4657,7 +6811,40 @@
               <a:defRPr sz="1400" b="0"/>
             </a:pPr>
             <a:r>
-              <a:t>     – question · queries · evidence{local, web_pro, web_con} · baseline_confidence · judge_flags{entity, modal, fact} · final · trace</a:t>
+              <a:rPr dirty="0"/>
+              <a:t>     – question · queries · evidence{local, </a:t>
+            </a:r>
+            <a:r>
+              <a:rPr dirty="0" err="1"/>
+              <a:t>web_pro</a:t>
+            </a:r>
+            <a:r>
+              <a:rPr dirty="0"/>
+              <a:t>, </a:t>
+            </a:r>
+            <a:r>
+              <a:rPr dirty="0" err="1"/>
+              <a:t>web_con</a:t>
+            </a:r>
+            <a:r>
+              <a:rPr dirty="0"/>
+              <a:t>} · </a:t>
+            </a:r>
+            <a:r>
+              <a:rPr dirty="0" err="1"/>
+              <a:t>baseline_confidence</a:t>
+            </a:r>
+            <a:r>
+              <a:rPr dirty="0"/>
+              <a:t> · </a:t>
+            </a:r>
+            <a:r>
+              <a:rPr dirty="0" err="1"/>
+              <a:t>judge_flags</a:t>
+            </a:r>
+            <a:r>
+              <a:rPr dirty="0"/>
+              <a:t>{entity, modal, fact} · final · trace</a:t>
             </a:r>
           </a:p>
           <a:p>
@@ -4672,6 +6859,7 @@
               </a:defRPr>
             </a:pPr>
             <a:r>
+              <a:rPr dirty="0"/>
               <a:t>• Deterministic while-loop orchestration (no framework takeover)</a:t>
             </a:r>
           </a:p>
@@ -4683,7 +6871,24 @@
               <a:defRPr sz="1400" b="0"/>
             </a:pPr>
             <a:r>
-              <a:t>     – Every gate is inspectable via the trace and ablatable — flip judge_flags.modal off, re-run, measure the delta</a:t>
+              <a:rPr dirty="0"/>
+              <a:t>     – Every gate is inspectable via the trace and </a:t>
+            </a:r>
+            <a:r>
+              <a:rPr dirty="0" err="1"/>
+              <a:t>ablatable</a:t>
+            </a:r>
+            <a:r>
+              <a:rPr dirty="0"/>
+              <a:t> — flip </a:t>
+            </a:r>
+            <a:r>
+              <a:rPr dirty="0" err="1"/>
+              <a:t>judge_flags.modal</a:t>
+            </a:r>
+            <a:r>
+              <a:rPr dirty="0"/>
+              <a:t> off, re-run, measure the delta</a:t>
             </a:r>
           </a:p>
         </p:txBody>
@@ -4697,7 +6902,7 @@
 </file>
 
 <file path=ppt/slides/slide8.xml><?xml version="1.0" encoding="utf-8"?>
-<p:sld xmlns:a="http://schemas.openxmlformats.org/drawingml/2006/main" xmlns:p="http://schemas.openxmlformats.org/presentationml/2006/main" xmlns:r="http://schemas.openxmlformats.org/officeDocument/2006/relationships">
+<p:sld xmlns:a="http://schemas.openxmlformats.org/drawingml/2006/main" xmlns:r="http://schemas.openxmlformats.org/officeDocument/2006/relationships" xmlns:p="http://schemas.openxmlformats.org/presentationml/2006/main">
   <p:cSld>
     <p:spTree>
       <p:nvGrpSpPr>
@@ -4705,7 +6910,14 @@
         <p:cNvGrpSpPr/>
         <p:nvPr/>
       </p:nvGrpSpPr>
-      <p:grpSpPr/>
+      <p:grpSpPr>
+        <a:xfrm>
+          <a:off x="0" y="0"/>
+          <a:ext cx="0" cy="0"/>
+          <a:chOff x="0" y="0"/>
+          <a:chExt cx="0" cy="0"/>
+        </a:xfrm>
+      </p:grpSpPr>
       <p:sp>
         <p:nvSpPr>
           <p:cNvPr id="2" name="TextBox 1"/>
@@ -4714,7 +6926,7 @@
         </p:nvSpPr>
         <p:spPr>
           <a:xfrm>
-            <a:off x="457200" y="182880"/>
+            <a:off x="548640" y="411480"/>
             <a:ext cx="11338560" cy="868680"/>
           </a:xfrm>
           <a:prstGeom prst="rect">
@@ -4736,6 +6948,7 @@
               </a:defRPr>
             </a:pPr>
             <a:r>
+              <a:rPr dirty="0"/>
               <a:t>Validation &amp; Key Findings</a:t>
             </a:r>
           </a:p>
@@ -4750,7 +6963,7 @@
         <p:spPr>
           <a:xfrm>
             <a:off x="640080" y="1280160"/>
-            <a:ext cx="10972800" cy="5212080"/>
+            <a:ext cx="10972800" cy="2313454"/>
           </a:xfrm>
           <a:prstGeom prst="rect">
             <a:avLst/>
@@ -4774,6 +6987,7 @@
               </a:defRPr>
             </a:pPr>
             <a:r>
+              <a:rPr dirty="0"/>
               <a:t>• The right baseline is NAIVE supplementation, not the frozen model:</a:t>
             </a:r>
           </a:p>
@@ -4785,6 +6999,7 @@
               <a:defRPr sz="1300" b="0"/>
             </a:pPr>
             <a:r>
+              <a:rPr dirty="0"/>
               <a:t>     – Naive external supplementation: net −4 to −5 (churn)  →  with the Court: net ≈ 0 (churn eliminated)</a:t>
             </a:r>
           </a:p>
@@ -4796,6 +7011,7 @@
               <a:defRPr sz="1300" b="0"/>
             </a:pPr>
             <a:r>
+              <a:rPr dirty="0"/>
               <a:t>     – The Court makes external-knowledge injection SAFE — the enabling contribution, independent of the raw score</a:t>
             </a:r>
           </a:p>
@@ -4811,8 +7027,14 @@
               </a:defRPr>
             </a:pPr>
             <a:r>
-              <a:t>• Ablation of the defenses (120 TF): net −4 → −2</a:t>
-            </a:r>
+              <a:rPr dirty="0"/>
+              <a:t>• </a:t>
+            </a:r>
+            <a:r>
+              <a:rPr lang="en-US" sz="1400" b="1" dirty="0"/>
+              <a:t>Ablation study confirms defense value: removing the Court drops net score back to -4</a:t>
+            </a:r>
+            <a:endParaRPr dirty="0"/>
           </a:p>
           <a:p>
             <a:pPr lvl="1">
@@ -4822,6 +7044,7 @@
               <a:defRPr sz="1300" b="0"/>
             </a:pPr>
             <a:r>
+              <a:rPr dirty="0"/>
               <a:t>     – Medical-ontology rule fixed the syndrome-vs-disease case; 3-vote Fact judge removed variance-driven regressions</a:t>
             </a:r>
           </a:p>
@@ -4837,6 +7060,7 @@
               </a:defRPr>
             </a:pPr>
             <a:r>
+              <a:rPr dirty="0"/>
               <a:t>• Qualitative finding — the system CORRECTED a benchmark error</a:t>
             </a:r>
           </a:p>
@@ -4848,6 +7072,7 @@
               <a:defRPr sz="1300" b="0"/>
             </a:pPr>
             <a:r>
+              <a:rPr dirty="0"/>
               <a:t>     – It flagged '90% of communication is nonverbal' as a debunked urban legend (Exa found the refuting paper), disagreeing with the curriculum gold — high-quality RAG can correct legacy errors in evaluation benchmarks</a:t>
             </a:r>
           </a:p>
@@ -4863,7 +7088,16 @@
               </a:defRPr>
             </a:pPr>
             <a:r>
-              <a:t>• Properties: frozen generator · free APIs (Exa / Europe PMC / PubMed) · no fine-tuning · every judge an ablatable module</a:t>
+              <a:rPr dirty="0"/>
+              <a:t>• Properties: frozen generator · free APIs (Exa / Europe PMC / PubMed) · no fine-tuning · every judge an </a:t>
+            </a:r>
+            <a:r>
+              <a:rPr dirty="0" err="1"/>
+              <a:t>ablatable</a:t>
+            </a:r>
+            <a:r>
+              <a:rPr dirty="0"/>
+              <a:t> module</a:t>
             </a:r>
           </a:p>
         </p:txBody>
